--- a/document/prezentare_scss.pptx
+++ b/document/prezentare_scss.pptx
@@ -23,7 +23,7 @@
   <p:notesSz cx="6858000" cy="9144000"/>
   <p:defaultTextStyle>
     <a:defPPr>
-      <a:defRPr lang="en-US"/>
+      <a:defRPr lang="ro-RO"/>
     </a:defPPr>
     <a:lvl1pPr marL="0" algn="l" defTabSz="914400" rtl="0">
       <a:defRPr sz="1800">
@@ -143,7 +143,7 @@
       </p:grpSpPr>
       <p:sp>
         <p:nvSpPr>
-          <p:cNvPr id="1373168393" name="Header Placeholder 1"/>
+          <p:cNvPr id="589144476" name="Header Placeholder 1"/>
           <p:cNvSpPr>
             <a:spLocks noGrp="1"/>
           </p:cNvSpPr>
@@ -177,7 +177,7 @@
       </p:sp>
       <p:sp>
         <p:nvSpPr>
-          <p:cNvPr id="1709276690" name="Date Placeholder 2"/>
+          <p:cNvPr id="176005339" name="Date Placeholder 2"/>
           <p:cNvSpPr>
             <a:spLocks noGrp="1"/>
           </p:cNvSpPr>
@@ -215,7 +215,7 @@
       </p:sp>
       <p:sp>
         <p:nvSpPr>
-          <p:cNvPr id="163351675" name="Slide Image Placeholder 3"/>
+          <p:cNvPr id="1151028761" name="Slide Image Placeholder 3"/>
           <p:cNvSpPr>
             <a:spLocks noChangeAspect="1" noGrp="1" noRot="1"/>
           </p:cNvSpPr>
@@ -251,7 +251,7 @@
       </p:sp>
       <p:sp>
         <p:nvSpPr>
-          <p:cNvPr id="352061009" name="Notes Placeholder 4"/>
+          <p:cNvPr id="1772437935" name="Notes Placeholder 4"/>
           <p:cNvSpPr>
             <a:spLocks noGrp="1"/>
           </p:cNvSpPr>
@@ -325,7 +325,7 @@
       </p:sp>
       <p:sp>
         <p:nvSpPr>
-          <p:cNvPr id="2141856099" name="Footer Placeholder 5"/>
+          <p:cNvPr id="1255701150" name="Footer Placeholder 5"/>
           <p:cNvSpPr>
             <a:spLocks noGrp="1"/>
           </p:cNvSpPr>
@@ -359,7 +359,7 @@
       </p:sp>
       <p:sp>
         <p:nvSpPr>
-          <p:cNvPr id="895297697" name="Slide Number Placeholder 6"/>
+          <p:cNvPr id="454968706" name="Slide Number Placeholder 6"/>
           <p:cNvSpPr>
             <a:spLocks noGrp="1"/>
           </p:cNvSpPr>
@@ -512,7 +512,7 @@
       </p:grpSpPr>
       <p:sp>
         <p:nvSpPr>
-          <p:cNvPr id="1876857248" name="Slide Image Placeholder 1"/>
+          <p:cNvPr id="1138225080" name="Slide Image Placeholder 1"/>
           <p:cNvSpPr>
             <a:spLocks noChangeAspect="1" noGrp="1" noRot="1"/>
           </p:cNvSpPr>
@@ -529,7 +529,7 @@
       </p:sp>
       <p:sp>
         <p:nvSpPr>
-          <p:cNvPr id="1025773333" name="Notes Placeholder 2"/>
+          <p:cNvPr id="2081290223" name="Notes Placeholder 2"/>
           <p:cNvSpPr>
             <a:spLocks noGrp="1"/>
           </p:cNvSpPr>
@@ -554,7 +554,7 @@
       </p:sp>
       <p:sp>
         <p:nvSpPr>
-          <p:cNvPr id="383824752" name="Slide Number Placeholder 3"/>
+          <p:cNvPr id="180781334" name="Slide Number Placeholder 3"/>
           <p:cNvSpPr>
             <a:spLocks noGrp="1"/>
           </p:cNvSpPr>
@@ -5329,7 +5329,7 @@
       </p:grpSpPr>
       <p:sp>
         <p:nvSpPr>
-          <p:cNvPr id="98286186" name="Title 1"/>
+          <p:cNvPr id="2036164413" name="Title 1"/>
           <p:cNvSpPr>
             <a:spLocks noGrp="1"/>
           </p:cNvSpPr>
@@ -5357,13 +5357,16 @@
                 <a:solidFill>
                   <a:srgbClr val="000000"/>
                 </a:solidFill>
-                <a:latin typeface="Times New Roman"/>
-                <a:ea typeface="Times New Roman"/>
-                <a:cs typeface="Times New Roman"/>
+                <a:latin typeface="Cantarell"/>
+                <a:ea typeface="Cantarell"/>
+                <a:cs typeface="Cantarell"/>
               </a:rPr>
               <a:t>Sistem pentru detecția și raportarea evenimentelor de</a:t>
             </a:r>
-            <a:endParaRPr sz="16000"/>
+            <a:endParaRPr sz="16000">
+              <a:latin typeface="Cantarell"/>
+              <a:cs typeface="Cantarell"/>
+            </a:endParaRPr>
           </a:p>
           <a:p>
             <a:pPr algn="ctr">
@@ -5374,19 +5377,22 @@
                 <a:solidFill>
                   <a:srgbClr val="000000"/>
                 </a:solidFill>
-                <a:latin typeface="Times New Roman"/>
-                <a:ea typeface="Times New Roman"/>
-                <a:cs typeface="Times New Roman"/>
+                <a:latin typeface="Cantarell"/>
+                <a:ea typeface="Cantarell"/>
+                <a:cs typeface="Cantarell"/>
               </a:rPr>
               <a:t>securitate în rețele industriale de comunicații.</a:t>
             </a:r>
-            <a:endParaRPr lang="en-US"/>
-          </a:p>
-        </p:txBody>
-      </p:sp>
-      <p:sp>
-        <p:nvSpPr>
-          <p:cNvPr id="1385523774" name="Subtitle 2"/>
+            <a:endParaRPr>
+              <a:latin typeface="Cantarell"/>
+              <a:cs typeface="Cantarell"/>
+            </a:endParaRPr>
+          </a:p>
+        </p:txBody>
+      </p:sp>
+      <p:sp>
+        <p:nvSpPr>
+          <p:cNvPr id="163809536" name="Subtitle 2"/>
           <p:cNvSpPr>
             <a:spLocks noGrp="1"/>
           </p:cNvSpPr>
@@ -5408,10 +5414,17 @@
               <a:defRPr/>
             </a:pPr>
             <a:r>
-              <a:rPr lang="en-US" sz="2600"/>
+              <a:rPr lang="en-US" sz="2600">
+                <a:latin typeface="Cantarell"/>
+                <a:ea typeface="Cantarell"/>
+                <a:cs typeface="Cantarell"/>
+              </a:rPr>
               <a:t>Theodor Predescu, grupa 342A1</a:t>
             </a:r>
-            <a:endParaRPr lang="en-US" sz="2600"/>
+            <a:endParaRPr sz="2600">
+              <a:latin typeface="Cantarell"/>
+              <a:cs typeface="Cantarell"/>
+            </a:endParaRPr>
           </a:p>
         </p:txBody>
       </p:sp>
@@ -5544,10 +5557,17 @@
               <a:defRPr/>
             </a:pPr>
             <a:r>
-              <a:rPr/>
+              <a:rPr>
+                <a:latin typeface="Cantarell"/>
+                <a:ea typeface="Cantarell"/>
+                <a:cs typeface="Cantarell"/>
+              </a:rPr>
               <a:t>Domeniul de lucru</a:t>
             </a:r>
-            <a:endParaRPr/>
+            <a:endParaRPr>
+              <a:latin typeface="Cantarell"/>
+              <a:cs typeface="Cantarell"/>
+            </a:endParaRPr>
           </a:p>
         </p:txBody>
       </p:sp>
@@ -5577,10 +5597,17 @@
               <a:defRPr/>
             </a:pPr>
             <a:r>
-              <a:rPr/>
+              <a:rPr>
+                <a:latin typeface="Cantarell"/>
+                <a:ea typeface="Cantarell"/>
+                <a:cs typeface="Cantarell"/>
+              </a:rPr>
               <a:t>Mediul industrial</a:t>
             </a:r>
-            <a:endParaRPr/>
+            <a:endParaRPr>
+              <a:latin typeface="Cantarell"/>
+              <a:cs typeface="Cantarell"/>
+            </a:endParaRPr>
           </a:p>
         </p:txBody>
       </p:sp>
@@ -5636,14 +5663,25 @@
               <a:defRPr/>
             </a:pPr>
             <a:r>
-              <a:rPr lang="ro-RO"/>
+              <a:rPr lang="ro-RO">
+                <a:latin typeface="Cantarell"/>
+                <a:ea typeface="Cantarell"/>
+                <a:cs typeface="Cantarell"/>
+              </a:rPr>
               <a:t>Problema adresat</a:t>
             </a:r>
             <a:r>
-              <a:rPr lang="ro-RO"/>
+              <a:rPr lang="ro-RO">
+                <a:latin typeface="Cantarell"/>
+                <a:ea typeface="Cantarell"/>
+                <a:cs typeface="Cantarell"/>
+              </a:rPr>
               <a:t>ă</a:t>
             </a:r>
-            <a:endParaRPr lang="ro-RO"/>
+            <a:endParaRPr>
+              <a:latin typeface="Cantarell"/>
+              <a:cs typeface="Cantarell"/>
+            </a:endParaRPr>
           </a:p>
         </p:txBody>
       </p:sp>
@@ -5657,7 +5695,12 @@
             <p:ph idx="1"/>
           </p:nvPr>
         </p:nvSpPr>
-        <p:spPr bwMode="auto"/>
+        <p:spPr bwMode="auto">
+          <a:xfrm flipH="0" flipV="0">
+            <a:off x="609599" y="2605548"/>
+            <a:ext cx="10972800" cy="3520615"/>
+          </a:xfrm>
+        </p:spPr>
         <p:txBody>
           <a:bodyPr/>
           <a:lstStyle/>
@@ -5668,10 +5711,33 @@
               <a:defRPr/>
             </a:pPr>
             <a:r>
-              <a:rPr lang="ro-RO"/>
+              <a:rPr lang="ro-RO">
+                <a:latin typeface="Cantarell"/>
+                <a:ea typeface="Cantarell"/>
+                <a:cs typeface="Cantarell"/>
+              </a:rPr>
               <a:t>Prevenirea intruziunilor</a:t>
             </a:r>
-            <a:endParaRPr lang="ro-RO"/>
+            <a:r>
+              <a:rPr lang="en-US">
+                <a:latin typeface="Cantarell"/>
+                <a:ea typeface="Cantarell"/>
+                <a:cs typeface="Cantarell"/>
+              </a:rPr>
+              <a:t> </a:t>
+            </a:r>
+            <a:r>
+              <a:rPr lang="ro-RO">
+                <a:latin typeface="Cantarell"/>
+                <a:ea typeface="Cantarell"/>
+                <a:cs typeface="Cantarell"/>
+              </a:rPr>
+              <a:t>pe dispozitive specifice</a:t>
+            </a:r>
+            <a:endParaRPr>
+              <a:latin typeface="Cantarell"/>
+              <a:cs typeface="Cantarell"/>
+            </a:endParaRPr>
           </a:p>
         </p:txBody>
       </p:sp>
@@ -5727,10 +5793,17 @@
               <a:defRPr/>
             </a:pPr>
             <a:r>
-              <a:rPr/>
-              <a:t>Solutia propusa</a:t>
-            </a:r>
-            <a:endParaRPr/>
+              <a:rPr>
+                <a:latin typeface="Cantarell"/>
+                <a:ea typeface="Cantarell"/>
+                <a:cs typeface="Cantarell"/>
+              </a:rPr>
+              <a:t>Soluția propusă</a:t>
+            </a:r>
+            <a:endParaRPr>
+              <a:latin typeface="Cantarell"/>
+              <a:cs typeface="Cantarell"/>
+            </a:endParaRPr>
           </a:p>
         </p:txBody>
       </p:sp>
@@ -5744,15 +5817,104 @@
             <p:ph idx="1"/>
           </p:nvPr>
         </p:nvSpPr>
-        <p:spPr bwMode="auto"/>
-        <p:txBody>
-          <a:bodyPr/>
-          <a:lstStyle/>
-          <a:p>
-            <a:pPr>
-              <a:defRPr/>
-            </a:pPr>
-            <a:endParaRPr/>
+        <p:spPr bwMode="auto">
+          <a:xfrm flipH="0" flipV="0">
+            <a:off x="609599" y="2513370"/>
+            <a:ext cx="10972800" cy="3612792"/>
+          </a:xfrm>
+        </p:spPr>
+        <p:txBody>
+          <a:bodyPr/>
+          <a:lstStyle/>
+          <a:p>
+            <a:pPr>
+              <a:defRPr/>
+            </a:pPr>
+            <a:r>
+              <a:rPr lang="ro-RO">
+                <a:latin typeface="Cantarell"/>
+                <a:ea typeface="Cantarell"/>
+                <a:cs typeface="Cantarell"/>
+              </a:rPr>
+              <a:t>Aplicație de monitorizare și</a:t>
+            </a:r>
+            <a:r>
+              <a:rPr lang="ro-RO">
+                <a:latin typeface="Cantarell"/>
+                <a:ea typeface="Cantarell"/>
+                <a:cs typeface="Cantarell"/>
+              </a:rPr>
+              <a:t> gestionare</a:t>
+            </a:r>
+            <a:r>
+              <a:rPr lang="ro-RO">
+                <a:latin typeface="Cantarell"/>
+                <a:ea typeface="Cantarell"/>
+                <a:cs typeface="Cantarell"/>
+              </a:rPr>
+              <a:t> a conexiunilor </a:t>
+            </a:r>
+            <a:r>
+              <a:rPr lang="ro-RO">
+                <a:latin typeface="Cantarell"/>
+                <a:ea typeface="Cantarell"/>
+                <a:cs typeface="Cantarell"/>
+              </a:rPr>
+              <a:t>  </a:t>
+            </a:r>
+            <a:r>
+              <a:rPr lang="ro-RO">
+                <a:latin typeface="Cantarell"/>
+                <a:ea typeface="Cantarell"/>
+                <a:cs typeface="Cantarell"/>
+              </a:rPr>
+              <a:t>într</a:t>
+            </a:r>
+            <a:r>
+              <a:rPr lang="ro-RO">
+                <a:latin typeface="Cantarell"/>
+                <a:ea typeface="Cantarell"/>
+                <a:cs typeface="Cantarell"/>
+              </a:rPr>
+              <a:t>-</a:t>
+            </a:r>
+            <a:r>
+              <a:rPr lang="ro-RO">
+                <a:latin typeface="Cantarell"/>
+                <a:ea typeface="Cantarell"/>
+                <a:cs typeface="Cantarell"/>
+              </a:rPr>
+              <a:t>o rețea</a:t>
+            </a:r>
+            <a:endParaRPr lang="ro-RO">
+              <a:latin typeface="Cantarell"/>
+              <a:cs typeface="Cantarell"/>
+            </a:endParaRPr>
+          </a:p>
+          <a:p>
+            <a:pPr>
+              <a:defRPr/>
+            </a:pPr>
+            <a:r>
+              <a:rPr lang="ro-RO">
+                <a:latin typeface="Cantarell"/>
+                <a:ea typeface="Cantarell"/>
+                <a:cs typeface="Cantarell"/>
+              </a:rPr>
+              <a:t>Soluție bazată pe </a:t>
+            </a:r>
+            <a:r>
+              <a:rPr lang="ro-RO">
+                <a:latin typeface="Cantarell"/>
+                <a:ea typeface="Cantarell"/>
+                <a:cs typeface="Cantarell"/>
+              </a:rPr>
+              <a:t>reguli</a:t>
+            </a:r>
+            <a:endParaRPr lang="ro-RO">
+              <a:latin typeface="Cantarell"/>
+              <a:cs typeface="Cantarell"/>
+            </a:endParaRPr>
           </a:p>
         </p:txBody>
       </p:sp>
@@ -5807,7 +5969,18 @@
             <a:pPr>
               <a:defRPr/>
             </a:pPr>
-            <a:endParaRPr/>
+            <a:r>
+              <a:rPr lang="ro-RO">
+                <a:latin typeface="Cantarell"/>
+                <a:ea typeface="Cantarell"/>
+                <a:cs typeface="Cantarell"/>
+              </a:rPr>
+              <a:t>Componente principale</a:t>
+            </a:r>
+            <a:endParaRPr>
+              <a:latin typeface="Cantarell"/>
+              <a:cs typeface="Cantarell"/>
+            </a:endParaRPr>
           </a:p>
         </p:txBody>
       </p:sp>
@@ -5821,15 +5994,111 @@
             <p:ph idx="1"/>
           </p:nvPr>
         </p:nvSpPr>
-        <p:spPr bwMode="auto"/>
-        <p:txBody>
-          <a:bodyPr/>
-          <a:lstStyle/>
-          <a:p>
-            <a:pPr>
-              <a:defRPr/>
-            </a:pPr>
-            <a:endParaRPr/>
+        <p:spPr bwMode="auto">
+          <a:xfrm flipH="0" flipV="0">
+            <a:off x="609599" y="2525661"/>
+            <a:ext cx="10972800" cy="3600502"/>
+          </a:xfrm>
+        </p:spPr>
+        <p:txBody>
+          <a:bodyPr/>
+          <a:lstStyle/>
+          <a:p>
+            <a:pPr marL="0" indent="0">
+              <a:buFont typeface="Arial"/>
+              <a:buNone/>
+              <a:defRPr/>
+            </a:pPr>
+            <a:r>
+              <a:rPr sz="3200" b="0" i="0" u="none">
+                <a:solidFill>
+                  <a:srgbClr val="000000"/>
+                </a:solidFill>
+                <a:latin typeface="Cantarell"/>
+                <a:ea typeface="Cantarell"/>
+                <a:cs typeface="Cantarell"/>
+              </a:rPr>
+              <a:t>1. componenta de filtrare la nivel kernel</a:t>
+            </a:r>
+            <a:endParaRPr sz="3200">
+              <a:latin typeface="Cantarell"/>
+              <a:cs typeface="Cantarell"/>
+            </a:endParaRPr>
+          </a:p>
+          <a:p>
+            <a:pPr marL="0" indent="0">
+              <a:buFont typeface="Arial"/>
+              <a:buNone/>
+              <a:defRPr/>
+            </a:pPr>
+            <a:r>
+              <a:rPr sz="3200" b="0" i="0" u="none">
+                <a:solidFill>
+                  <a:srgbClr val="000000"/>
+                </a:solidFill>
+                <a:latin typeface="Cantarell"/>
+                <a:ea typeface="Cantarell"/>
+                <a:cs typeface="Cantarell"/>
+              </a:rPr>
+              <a:t>2. componenta de intermediere</a:t>
+            </a:r>
+            <a:endParaRPr sz="3200">
+              <a:latin typeface="Cantarell"/>
+              <a:cs typeface="Cantarell"/>
+            </a:endParaRPr>
+          </a:p>
+          <a:p>
+            <a:pPr marL="0" indent="0">
+              <a:buFont typeface="Arial"/>
+              <a:buNone/>
+              <a:defRPr/>
+            </a:pPr>
+            <a:r>
+              <a:rPr sz="3200" b="0" i="0" u="none">
+                <a:solidFill>
+                  <a:srgbClr val="000000"/>
+                </a:solidFill>
+                <a:latin typeface="Cantarell"/>
+                <a:ea typeface="Cantarell"/>
+                <a:cs typeface="Cantarell"/>
+              </a:rPr>
+              <a:t>3. componenta centrală</a:t>
+            </a:r>
+            <a:endParaRPr sz="3200">
+              <a:latin typeface="Cantarell"/>
+              <a:cs typeface="Cantarell"/>
+            </a:endParaRPr>
+          </a:p>
+          <a:p>
+            <a:pPr marL="0" indent="0">
+              <a:buFont typeface="Arial"/>
+              <a:buNone/>
+              <a:defRPr/>
+            </a:pPr>
+            <a:r>
+              <a:rPr sz="3200" b="0" i="0" u="none">
+                <a:solidFill>
+                  <a:srgbClr val="000000"/>
+                </a:solidFill>
+                <a:latin typeface="Cantarell"/>
+                <a:ea typeface="Cantarell"/>
+                <a:cs typeface="Cantarell"/>
+              </a:rPr>
+              <a:t>4. componenta de administrare</a:t>
+            </a:r>
+            <a:endParaRPr sz="3200">
+              <a:latin typeface="Cantarell"/>
+              <a:cs typeface="Cantarell"/>
+            </a:endParaRPr>
+          </a:p>
+          <a:p>
+            <a:pPr>
+              <a:defRPr/>
+            </a:pPr>
+            <a:endParaRPr>
+              <a:latin typeface="Cantarell"/>
+              <a:cs typeface="Cantarell"/>
+            </a:endParaRPr>
           </a:p>
         </p:txBody>
       </p:sp>

--- a/document/prezentare_scss.pptx
+++ b/document/prezentare_scss.pptx
@@ -5,7 +5,7 @@
     <p:sldMasterId id="2147483648" r:id="rId1"/>
   </p:sldMasterIdLst>
   <p:notesMasterIdLst>
-    <p:notesMasterId r:id="rId14"/>
+    <p:notesMasterId r:id="rId12"/>
   </p:notesMasterIdLst>
   <p:sldIdLst>
     <p:sldId id="256" r:id="rId4"/>
@@ -16,8 +16,6 @@
     <p:sldId id="261" r:id="rId9"/>
     <p:sldId id="262" r:id="rId10"/>
     <p:sldId id="263" r:id="rId11"/>
-    <p:sldId id="264" r:id="rId12"/>
-    <p:sldId id="265" r:id="rId13"/>
   </p:sldIdLst>
   <p:sldSz cx="12192000" cy="6858000"/>
   <p:notesSz cx="6858000" cy="9144000"/>
@@ -143,7 +141,7 @@
       </p:grpSpPr>
       <p:sp>
         <p:nvSpPr>
-          <p:cNvPr id="589144476" name="Header Placeholder 1"/>
+          <p:cNvPr id="1516805500" name="Header Placeholder 1"/>
           <p:cNvSpPr>
             <a:spLocks noGrp="1"/>
           </p:cNvSpPr>
@@ -177,7 +175,7 @@
       </p:sp>
       <p:sp>
         <p:nvSpPr>
-          <p:cNvPr id="176005339" name="Date Placeholder 2"/>
+          <p:cNvPr id="1684285053" name="Date Placeholder 2"/>
           <p:cNvSpPr>
             <a:spLocks noGrp="1"/>
           </p:cNvSpPr>
@@ -215,7 +213,7 @@
       </p:sp>
       <p:sp>
         <p:nvSpPr>
-          <p:cNvPr id="1151028761" name="Slide Image Placeholder 3"/>
+          <p:cNvPr id="1113101882" name="Slide Image Placeholder 3"/>
           <p:cNvSpPr>
             <a:spLocks noChangeAspect="1" noGrp="1" noRot="1"/>
           </p:cNvSpPr>
@@ -251,7 +249,7 @@
       </p:sp>
       <p:sp>
         <p:nvSpPr>
-          <p:cNvPr id="1772437935" name="Notes Placeholder 4"/>
+          <p:cNvPr id="1313184887" name="Notes Placeholder 4"/>
           <p:cNvSpPr>
             <a:spLocks noGrp="1"/>
           </p:cNvSpPr>
@@ -325,7 +323,7 @@
       </p:sp>
       <p:sp>
         <p:nvSpPr>
-          <p:cNvPr id="1255701150" name="Footer Placeholder 5"/>
+          <p:cNvPr id="1040689979" name="Footer Placeholder 5"/>
           <p:cNvSpPr>
             <a:spLocks noGrp="1"/>
           </p:cNvSpPr>
@@ -359,7 +357,7 @@
       </p:sp>
       <p:sp>
         <p:nvSpPr>
-          <p:cNvPr id="454968706" name="Slide Number Placeholder 6"/>
+          <p:cNvPr id="2108252570" name="Slide Number Placeholder 6"/>
           <p:cNvSpPr>
             <a:spLocks noGrp="1"/>
           </p:cNvSpPr>
@@ -512,7 +510,7 @@
       </p:grpSpPr>
       <p:sp>
         <p:nvSpPr>
-          <p:cNvPr id="1138225080" name="Slide Image Placeholder 1"/>
+          <p:cNvPr id="1455957014" name="Slide Image Placeholder 1"/>
           <p:cNvSpPr>
             <a:spLocks noChangeAspect="1" noGrp="1" noRot="1"/>
           </p:cNvSpPr>
@@ -529,7 +527,7 @@
       </p:sp>
       <p:sp>
         <p:nvSpPr>
-          <p:cNvPr id="2081290223" name="Notes Placeholder 2"/>
+          <p:cNvPr id="279129545" name="Notes Placeholder 2"/>
           <p:cNvSpPr>
             <a:spLocks noGrp="1"/>
           </p:cNvSpPr>
@@ -554,7 +552,7 @@
       </p:sp>
       <p:sp>
         <p:nvSpPr>
-          <p:cNvPr id="180781334" name="Slide Number Placeholder 3"/>
+          <p:cNvPr id="1758911899" name="Slide Number Placeholder 3"/>
           <p:cNvSpPr>
             <a:spLocks noGrp="1"/>
           </p:cNvSpPr>
@@ -575,91 +573,6 @@
               <a:t>1</a:t>
             </a:fld>
             <a:endParaRPr lang="en-US"/>
-          </a:p>
-        </p:txBody>
-      </p:sp>
-    </p:spTree>
-  </p:cSld>
-  <p:clrMapOvr>
-    <a:masterClrMapping/>
-  </p:clrMapOvr>
-</p:notes>
-</file>
-
-<file path=ppt/notesSlides/notesSlide10.xml><?xml version="1.0" encoding="utf-8"?>
-<p:notes xmlns:a="http://schemas.openxmlformats.org/drawingml/2006/main" xmlns:r="http://schemas.openxmlformats.org/officeDocument/2006/relationships" xmlns:p="http://schemas.openxmlformats.org/presentationml/2006/main" xmlns:m="http://schemas.openxmlformats.org/officeDocument/2006/math" xmlns:w="http://schemas.openxmlformats.org/wordprocessingml/2006/main">
-  <p:cSld name="">
-    <p:spTree>
-      <p:nvGrpSpPr>
-        <p:cNvPr id="1" name=""/>
-        <p:cNvGrpSpPr/>
-        <p:nvPr/>
-      </p:nvGrpSpPr>
-      <p:grpSpPr bwMode="auto">
-        <a:xfrm>
-          <a:off x="0" y="0"/>
-          <a:ext cx="0" cy="0"/>
-          <a:chOff x="0" y="0"/>
-          <a:chExt cx="0" cy="0"/>
-        </a:xfrm>
-      </p:grpSpPr>
-      <p:sp>
-        <p:nvSpPr>
-          <p:cNvPr id="873803961" name="Slide Image Placeholder 1"/>
-          <p:cNvSpPr>
-            <a:spLocks noChangeAspect="1" noGrp="1" noRot="1"/>
-          </p:cNvSpPr>
-          <p:nvPr>
-            <p:ph type="sldImg"/>
-          </p:nvPr>
-        </p:nvSpPr>
-        <p:spPr bwMode="auto"/>
-      </p:sp>
-      <p:sp>
-        <p:nvSpPr>
-          <p:cNvPr id="1603295819" name="Notes Placeholder 2"/>
-          <p:cNvSpPr>
-            <a:spLocks noGrp="1"/>
-          </p:cNvSpPr>
-          <p:nvPr>
-            <p:ph type="body" idx="1"/>
-          </p:nvPr>
-        </p:nvSpPr>
-        <p:spPr bwMode="auto"/>
-        <p:txBody>
-          <a:bodyPr/>
-          <a:lstStyle/>
-          <a:p>
-            <a:pPr>
-              <a:defRPr/>
-            </a:pPr>
-            <a:endParaRPr/>
-          </a:p>
-        </p:txBody>
-      </p:sp>
-      <p:sp>
-        <p:nvSpPr>
-          <p:cNvPr id="1963930928" name="Slide Number Placeholder 3"/>
-          <p:cNvSpPr>
-            <a:spLocks noGrp="1"/>
-          </p:cNvSpPr>
-          <p:nvPr>
-            <p:ph type="sldNum" sz="quarter" idx="10"/>
-          </p:nvPr>
-        </p:nvSpPr>
-        <p:spPr bwMode="auto"/>
-        <p:txBody>
-          <a:bodyPr/>
-          <a:lstStyle/>
-          <a:p>
-            <a:pPr>
-              <a:defRPr/>
-            </a:pPr>
-            <a:fld id="{434D16DC-48C4-E168-F952-82C669E57C14}" type="slidenum">
-              <a:rPr/>
-              <a:t/>
-            </a:fld>
-            <a:endParaRPr/>
           </a:p>
         </p:txBody>
       </p:sp>
@@ -1251,91 +1164,6 @@
               <a:defRPr/>
             </a:pPr>
             <a:fld id="{B176B3BA-0FDF-4629-213E-EC55DE52E198}" type="slidenum">
-              <a:rPr/>
-              <a:t/>
-            </a:fld>
-            <a:endParaRPr/>
-          </a:p>
-        </p:txBody>
-      </p:sp>
-    </p:spTree>
-  </p:cSld>
-  <p:clrMapOvr>
-    <a:masterClrMapping/>
-  </p:clrMapOvr>
-</p:notes>
-</file>
-
-<file path=ppt/notesSlides/notesSlide9.xml><?xml version="1.0" encoding="utf-8"?>
-<p:notes xmlns:a="http://schemas.openxmlformats.org/drawingml/2006/main" xmlns:r="http://schemas.openxmlformats.org/officeDocument/2006/relationships" xmlns:p="http://schemas.openxmlformats.org/presentationml/2006/main" xmlns:m="http://schemas.openxmlformats.org/officeDocument/2006/math" xmlns:w="http://schemas.openxmlformats.org/wordprocessingml/2006/main">
-  <p:cSld name="">
-    <p:spTree>
-      <p:nvGrpSpPr>
-        <p:cNvPr id="1" name=""/>
-        <p:cNvGrpSpPr/>
-        <p:nvPr/>
-      </p:nvGrpSpPr>
-      <p:grpSpPr bwMode="auto">
-        <a:xfrm>
-          <a:off x="0" y="0"/>
-          <a:ext cx="0" cy="0"/>
-          <a:chOff x="0" y="0"/>
-          <a:chExt cx="0" cy="0"/>
-        </a:xfrm>
-      </p:grpSpPr>
-      <p:sp>
-        <p:nvSpPr>
-          <p:cNvPr id="1910948014" name="Slide Image Placeholder 1"/>
-          <p:cNvSpPr>
-            <a:spLocks noChangeAspect="1" noGrp="1" noRot="1"/>
-          </p:cNvSpPr>
-          <p:nvPr>
-            <p:ph type="sldImg"/>
-          </p:nvPr>
-        </p:nvSpPr>
-        <p:spPr bwMode="auto"/>
-      </p:sp>
-      <p:sp>
-        <p:nvSpPr>
-          <p:cNvPr id="1987287872" name="Notes Placeholder 2"/>
-          <p:cNvSpPr>
-            <a:spLocks noGrp="1"/>
-          </p:cNvSpPr>
-          <p:nvPr>
-            <p:ph type="body" idx="1"/>
-          </p:nvPr>
-        </p:nvSpPr>
-        <p:spPr bwMode="auto"/>
-        <p:txBody>
-          <a:bodyPr/>
-          <a:lstStyle/>
-          <a:p>
-            <a:pPr>
-              <a:defRPr/>
-            </a:pPr>
-            <a:endParaRPr/>
-          </a:p>
-        </p:txBody>
-      </p:sp>
-      <p:sp>
-        <p:nvSpPr>
-          <p:cNvPr id="501638714" name="Slide Number Placeholder 3"/>
-          <p:cNvSpPr>
-            <a:spLocks noGrp="1"/>
-          </p:cNvSpPr>
-          <p:nvPr>
-            <p:ph type="sldNum" sz="quarter" idx="10"/>
-          </p:nvPr>
-        </p:nvSpPr>
-        <p:spPr bwMode="auto"/>
-        <p:txBody>
-          <a:bodyPr/>
-          <a:lstStyle/>
-          <a:p>
-            <a:pPr>
-              <a:defRPr/>
-            </a:pPr>
-            <a:fld id="{5BEB0E07-5276-E1CC-C77A-ECA5A646B1CB}" type="slidenum">
               <a:rPr/>
               <a:t/>
             </a:fld>
@@ -5329,7 +5157,7 @@
       </p:grpSpPr>
       <p:sp>
         <p:nvSpPr>
-          <p:cNvPr id="2036164413" name="Title 1"/>
+          <p:cNvPr id="102744156" name="Title 1"/>
           <p:cNvSpPr>
             <a:spLocks noGrp="1"/>
           </p:cNvSpPr>
@@ -5392,7 +5220,7 @@
       </p:sp>
       <p:sp>
         <p:nvSpPr>
-          <p:cNvPr id="163809536" name="Subtitle 2"/>
+          <p:cNvPr id="823749719" name="Subtitle 2"/>
           <p:cNvSpPr>
             <a:spLocks noGrp="1"/>
           </p:cNvSpPr>
@@ -5414,94 +5242,17 @@
               <a:defRPr/>
             </a:pPr>
             <a:r>
-              <a:rPr lang="en-US" sz="2600">
+              <a:rPr lang="ro-RO" sz="2600">
                 <a:latin typeface="Cantarell"/>
                 <a:ea typeface="Cantarell"/>
                 <a:cs typeface="Cantarell"/>
               </a:rPr>
               <a:t>Theodor Predescu, grupa 342A1</a:t>
             </a:r>
-            <a:endParaRPr sz="2600">
+            <a:endParaRPr lang="ro-RO" sz="2600">
               <a:latin typeface="Cantarell"/>
               <a:cs typeface="Cantarell"/>
             </a:endParaRPr>
-          </a:p>
-        </p:txBody>
-      </p:sp>
-    </p:spTree>
-  </p:cSld>
-  <p:clrMapOvr>
-    <a:masterClrMapping/>
-  </p:clrMapOvr>
-  <mc:AlternateContent xmlns:mc="http://schemas.openxmlformats.org/markup-compatibility/2006">
-    <mc:Choice xmlns:p159="http://schemas.microsoft.com/office/powerpoint/2015/09/main" xmlns:p14="http://schemas.microsoft.com/office/powerpoint/2010/main" Requires="p159">
-      <p:transition p14:dur="500" advClick="1"/>
-    </mc:Choice>
-    <mc:Fallback>
-      <p:transition advClick="1"/>
-    </mc:Fallback>
-  </mc:AlternateContent>
-</p:sld>
-</file>
-
-<file path=ppt/slides/slide10.xml><?xml version="1.0" encoding="utf-8"?>
-<p:sld xmlns:a="http://schemas.openxmlformats.org/drawingml/2006/main" xmlns:r="http://schemas.openxmlformats.org/officeDocument/2006/relationships" xmlns:p="http://schemas.openxmlformats.org/presentationml/2006/main" xmlns:m="http://schemas.openxmlformats.org/officeDocument/2006/math" xmlns:w="http://schemas.openxmlformats.org/wordprocessingml/2006/main" xmlns:mc="http://schemas.openxmlformats.org/markup-compatibility/2006" showMasterPhAnim="0" showMasterSp="1" show="1">
-  <p:cSld name="">
-    <p:spTree>
-      <p:nvGrpSpPr>
-        <p:cNvPr id="1" name=""/>
-        <p:cNvGrpSpPr/>
-        <p:nvPr/>
-      </p:nvGrpSpPr>
-      <p:grpSpPr bwMode="auto">
-        <a:xfrm>
-          <a:off x="0" y="0"/>
-          <a:ext cx="0" cy="0"/>
-          <a:chOff x="0" y="0"/>
-          <a:chExt cx="0" cy="0"/>
-        </a:xfrm>
-      </p:grpSpPr>
-      <p:sp>
-        <p:nvSpPr>
-          <p:cNvPr id="14435055" name="Title 1"/>
-          <p:cNvSpPr>
-            <a:spLocks noGrp="1"/>
-          </p:cNvSpPr>
-          <p:nvPr>
-            <p:ph type="title"/>
-          </p:nvPr>
-        </p:nvSpPr>
-        <p:spPr bwMode="auto"/>
-        <p:txBody>
-          <a:bodyPr/>
-          <a:lstStyle/>
-          <a:p>
-            <a:pPr>
-              <a:defRPr/>
-            </a:pPr>
-            <a:endParaRPr/>
-          </a:p>
-        </p:txBody>
-      </p:sp>
-      <p:sp>
-        <p:nvSpPr>
-          <p:cNvPr id="1682994367" name="Content Placeholder 2"/>
-          <p:cNvSpPr>
-            <a:spLocks noGrp="1"/>
-          </p:cNvSpPr>
-          <p:nvPr>
-            <p:ph idx="1"/>
-          </p:nvPr>
-        </p:nvSpPr>
-        <p:spPr bwMode="auto"/>
-        <p:txBody>
-          <a:bodyPr/>
-          <a:lstStyle/>
-          <a:p>
-            <a:pPr>
-              <a:defRPr/>
-            </a:pPr>
-            <a:endParaRPr/>
           </a:p>
         </p:txBody>
       </p:sp>
@@ -6012,7 +5763,7 @@
             <a:r>
               <a:rPr sz="3200" b="0" i="0" u="none">
                 <a:solidFill>
-                  <a:srgbClr val="000000"/>
+                  <a:srgbClr val="404040"/>
                 </a:solidFill>
                 <a:latin typeface="Cantarell"/>
                 <a:ea typeface="Cantarell"/>
@@ -6021,6 +5772,9 @@
               <a:t>1. componenta de filtrare la nivel kernel</a:t>
             </a:r>
             <a:endParaRPr sz="3200">
+              <a:solidFill>
+                <a:srgbClr val="404040"/>
+              </a:solidFill>
               <a:latin typeface="Cantarell"/>
               <a:cs typeface="Cantarell"/>
             </a:endParaRPr>
@@ -6034,7 +5788,7 @@
             <a:r>
               <a:rPr sz="3200" b="0" i="0" u="none">
                 <a:solidFill>
-                  <a:srgbClr val="000000"/>
+                  <a:srgbClr val="404040"/>
                 </a:solidFill>
                 <a:latin typeface="Cantarell"/>
                 <a:ea typeface="Cantarell"/>
@@ -6043,6 +5797,9 @@
               <a:t>2. componenta de intermediere</a:t>
             </a:r>
             <a:endParaRPr sz="3200">
+              <a:solidFill>
+                <a:srgbClr val="404040"/>
+              </a:solidFill>
               <a:latin typeface="Cantarell"/>
               <a:cs typeface="Cantarell"/>
             </a:endParaRPr>
@@ -6056,7 +5813,7 @@
             <a:r>
               <a:rPr sz="3200" b="0" i="0" u="none">
                 <a:solidFill>
-                  <a:srgbClr val="000000"/>
+                  <a:srgbClr val="404040"/>
                 </a:solidFill>
                 <a:latin typeface="Cantarell"/>
                 <a:ea typeface="Cantarell"/>
@@ -6065,6 +5822,9 @@
               <a:t>3. componenta centrală</a:t>
             </a:r>
             <a:endParaRPr sz="3200">
+              <a:solidFill>
+                <a:srgbClr val="404040"/>
+              </a:solidFill>
               <a:latin typeface="Cantarell"/>
               <a:cs typeface="Cantarell"/>
             </a:endParaRPr>
@@ -6078,7 +5838,7 @@
             <a:r>
               <a:rPr sz="3200" b="0" i="0" u="none">
                 <a:solidFill>
-                  <a:srgbClr val="000000"/>
+                  <a:srgbClr val="404040"/>
                 </a:solidFill>
                 <a:latin typeface="Cantarell"/>
                 <a:ea typeface="Cantarell"/>
@@ -6087,6 +5847,9 @@
               <a:t>4. componenta de administrare</a:t>
             </a:r>
             <a:endParaRPr sz="3200">
+              <a:solidFill>
+                <a:srgbClr val="404040"/>
+              </a:solidFill>
               <a:latin typeface="Cantarell"/>
               <a:cs typeface="Cantarell"/>
             </a:endParaRPr>
@@ -6096,6 +5859,9 @@
               <a:defRPr/>
             </a:pPr>
             <a:endParaRPr>
+              <a:solidFill>
+                <a:srgbClr val="404040"/>
+              </a:solidFill>
               <a:latin typeface="Cantarell"/>
               <a:cs typeface="Cantarell"/>
             </a:endParaRPr>
@@ -6153,6 +5919,10 @@
             <a:pPr>
               <a:defRPr/>
             </a:pPr>
+            <a:r>
+              <a:rPr/>
+              <a:t>Cum funcționează ?</a:t>
+            </a:r>
             <a:endParaRPr/>
           </a:p>
         </p:txBody>
@@ -6167,10 +5937,53 @@
             <p:ph idx="1"/>
           </p:nvPr>
         </p:nvSpPr>
-        <p:spPr bwMode="auto"/>
-        <p:txBody>
-          <a:bodyPr/>
-          <a:lstStyle/>
+        <p:spPr bwMode="auto">
+          <a:xfrm flipH="0" flipV="0">
+            <a:off x="609599" y="2832919"/>
+            <a:ext cx="10972800" cy="2826774"/>
+          </a:xfrm>
+        </p:spPr>
+        <p:txBody>
+          <a:bodyPr/>
+          <a:lstStyle/>
+          <a:p>
+            <a:pPr>
+              <a:defRPr/>
+            </a:pPr>
+            <a:r>
+              <a:rPr/>
+              <a:t>Aplicarea regulilor alese pe echipament</a:t>
+            </a:r>
+            <a:endParaRPr/>
+          </a:p>
+          <a:p>
+            <a:pPr>
+              <a:defRPr/>
+            </a:pPr>
+            <a:r>
+              <a:rPr>
+                <a:solidFill>
+                  <a:srgbClr val="404040"/>
+                </a:solidFill>
+              </a:rPr>
+              <a:t>Extragerea </a:t>
+            </a:r>
+            <a:r>
+              <a:rPr/>
+              <a:t>și vizualizarea conexiunilor în mod grafic</a:t>
+            </a:r>
+            <a:endParaRPr/>
+          </a:p>
+          <a:p>
+            <a:pPr>
+              <a:defRPr/>
+            </a:pPr>
+            <a:r>
+              <a:rPr/>
+              <a:t>Modificarea acestora în timp real</a:t>
+            </a:r>
+            <a:endParaRPr/>
+          </a:p>
           <a:p>
             <a:pPr>
               <a:defRPr/>
@@ -6214,7 +6027,7 @@
       </p:grpSpPr>
       <p:sp>
         <p:nvSpPr>
-          <p:cNvPr id="1642416261" name="Title 1"/>
+          <p:cNvPr id="1615936370" name="Title 1"/>
           <p:cNvSpPr>
             <a:spLocks noGrp="1"/>
           </p:cNvSpPr>
@@ -6222,36 +6035,23 @@
             <p:ph type="title"/>
           </p:nvPr>
         </p:nvSpPr>
-        <p:spPr bwMode="auto"/>
-        <p:txBody>
-          <a:bodyPr/>
-          <a:lstStyle/>
-          <a:p>
-            <a:pPr>
-              <a:defRPr/>
-            </a:pPr>
-            <a:endParaRPr/>
-          </a:p>
-        </p:txBody>
-      </p:sp>
-      <p:sp>
-        <p:nvSpPr>
-          <p:cNvPr id="728406350" name="Content Placeholder 2"/>
-          <p:cNvSpPr>
-            <a:spLocks noGrp="1"/>
-          </p:cNvSpPr>
-          <p:nvPr>
-            <p:ph idx="1"/>
-          </p:nvPr>
-        </p:nvSpPr>
-        <p:spPr bwMode="auto"/>
-        <p:txBody>
-          <a:bodyPr/>
-          <a:lstStyle/>
-          <a:p>
-            <a:pPr>
-              <a:defRPr/>
-            </a:pPr>
+        <p:spPr bwMode="auto">
+          <a:xfrm>
+            <a:off x="609599" y="1515961"/>
+            <a:ext cx="10972800" cy="1143000"/>
+          </a:xfrm>
+        </p:spPr>
+        <p:txBody>
+          <a:bodyPr/>
+          <a:lstStyle/>
+          <a:p>
+            <a:pPr algn="ctr">
+              <a:defRPr/>
+            </a:pPr>
+            <a:r>
+              <a:rPr/>
+              <a:t>DEMO</a:t>
+            </a:r>
             <a:endParaRPr/>
           </a:p>
         </p:txBody>
@@ -6291,7 +6091,7 @@
       </p:grpSpPr>
       <p:sp>
         <p:nvSpPr>
-          <p:cNvPr id="625351513" name="Title 1"/>
+          <p:cNvPr id="975787259" name="Title 1"/>
           <p:cNvSpPr>
             <a:spLocks noGrp="1"/>
           </p:cNvSpPr>
@@ -6299,113 +6099,23 @@
             <p:ph type="title"/>
           </p:nvPr>
         </p:nvSpPr>
-        <p:spPr bwMode="auto"/>
-        <p:txBody>
-          <a:bodyPr/>
-          <a:lstStyle/>
-          <a:p>
-            <a:pPr>
-              <a:defRPr/>
-            </a:pPr>
-            <a:endParaRPr/>
-          </a:p>
-        </p:txBody>
-      </p:sp>
-      <p:sp>
-        <p:nvSpPr>
-          <p:cNvPr id="1891837290" name="Content Placeholder 2"/>
-          <p:cNvSpPr>
-            <a:spLocks noGrp="1"/>
-          </p:cNvSpPr>
-          <p:nvPr>
-            <p:ph idx="1"/>
-          </p:nvPr>
-        </p:nvSpPr>
-        <p:spPr bwMode="auto"/>
-        <p:txBody>
-          <a:bodyPr/>
-          <a:lstStyle/>
-          <a:p>
-            <a:pPr>
-              <a:defRPr/>
-            </a:pPr>
-            <a:endParaRPr/>
-          </a:p>
-        </p:txBody>
-      </p:sp>
-    </p:spTree>
-  </p:cSld>
-  <p:clrMapOvr>
-    <a:masterClrMapping/>
-  </p:clrMapOvr>
-  <mc:AlternateContent xmlns:mc="http://schemas.openxmlformats.org/markup-compatibility/2006">
-    <mc:Choice xmlns:p159="http://schemas.microsoft.com/office/powerpoint/2015/09/main" xmlns:p14="http://schemas.microsoft.com/office/powerpoint/2010/main" Requires="p159">
-      <p:transition p14:dur="500" advClick="1"/>
-    </mc:Choice>
-    <mc:Fallback>
-      <p:transition advClick="1"/>
-    </mc:Fallback>
-  </mc:AlternateContent>
-</p:sld>
-</file>
-
-<file path=ppt/slides/slide9.xml><?xml version="1.0" encoding="utf-8"?>
-<p:sld xmlns:a="http://schemas.openxmlformats.org/drawingml/2006/main" xmlns:r="http://schemas.openxmlformats.org/officeDocument/2006/relationships" xmlns:p="http://schemas.openxmlformats.org/presentationml/2006/main" xmlns:m="http://schemas.openxmlformats.org/officeDocument/2006/math" xmlns:w="http://schemas.openxmlformats.org/wordprocessingml/2006/main" xmlns:mc="http://schemas.openxmlformats.org/markup-compatibility/2006" showMasterPhAnim="0" showMasterSp="1" show="1">
-  <p:cSld name="">
-    <p:spTree>
-      <p:nvGrpSpPr>
-        <p:cNvPr id="1" name=""/>
-        <p:cNvGrpSpPr/>
-        <p:nvPr/>
-      </p:nvGrpSpPr>
-      <p:grpSpPr bwMode="auto">
-        <a:xfrm>
-          <a:off x="0" y="0"/>
-          <a:ext cx="0" cy="0"/>
-          <a:chOff x="0" y="0"/>
-          <a:chExt cx="0" cy="0"/>
-        </a:xfrm>
-      </p:grpSpPr>
-      <p:sp>
-        <p:nvSpPr>
-          <p:cNvPr id="1691871409" name="Title 1"/>
-          <p:cNvSpPr>
-            <a:spLocks noGrp="1"/>
-          </p:cNvSpPr>
-          <p:nvPr>
-            <p:ph type="title"/>
-          </p:nvPr>
-        </p:nvSpPr>
-        <p:spPr bwMode="auto"/>
-        <p:txBody>
-          <a:bodyPr/>
-          <a:lstStyle/>
-          <a:p>
-            <a:pPr>
-              <a:defRPr/>
-            </a:pPr>
-            <a:endParaRPr/>
-          </a:p>
-        </p:txBody>
-      </p:sp>
-      <p:sp>
-        <p:nvSpPr>
-          <p:cNvPr id="1627095299" name="Content Placeholder 2"/>
-          <p:cNvSpPr>
-            <a:spLocks noGrp="1"/>
-          </p:cNvSpPr>
-          <p:nvPr>
-            <p:ph idx="1"/>
-          </p:nvPr>
-        </p:nvSpPr>
-        <p:spPr bwMode="auto"/>
-        <p:txBody>
-          <a:bodyPr/>
-          <a:lstStyle/>
-          <a:p>
-            <a:pPr>
-              <a:defRPr/>
-            </a:pPr>
+        <p:spPr bwMode="auto">
+          <a:xfrm>
+            <a:off x="609599" y="2026009"/>
+            <a:ext cx="10972800" cy="1143000"/>
+          </a:xfrm>
+        </p:spPr>
+        <p:txBody>
+          <a:bodyPr/>
+          <a:lstStyle/>
+          <a:p>
+            <a:pPr algn="ctr">
+              <a:defRPr/>
+            </a:pPr>
+            <a:r>
+              <a:rPr/>
+              <a:t>Vă mulțumesc!</a:t>
+            </a:r>
             <a:endParaRPr/>
           </a:p>
         </p:txBody>

--- a/document/prezentare_scss.pptx
+++ b/document/prezentare_scss.pptx
@@ -141,7 +141,7 @@
       </p:grpSpPr>
       <p:sp>
         <p:nvSpPr>
-          <p:cNvPr id="1516805500" name="Header Placeholder 1"/>
+          <p:cNvPr id="379127086" name="Header Placeholder 1"/>
           <p:cNvSpPr>
             <a:spLocks noGrp="1"/>
           </p:cNvSpPr>
@@ -175,7 +175,7 @@
       </p:sp>
       <p:sp>
         <p:nvSpPr>
-          <p:cNvPr id="1684285053" name="Date Placeholder 2"/>
+          <p:cNvPr id="550417191" name="Date Placeholder 2"/>
           <p:cNvSpPr>
             <a:spLocks noGrp="1"/>
           </p:cNvSpPr>
@@ -213,7 +213,7 @@
       </p:sp>
       <p:sp>
         <p:nvSpPr>
-          <p:cNvPr id="1113101882" name="Slide Image Placeholder 3"/>
+          <p:cNvPr id="1669960567" name="Slide Image Placeholder 3"/>
           <p:cNvSpPr>
             <a:spLocks noChangeAspect="1" noGrp="1" noRot="1"/>
           </p:cNvSpPr>
@@ -249,7 +249,7 @@
       </p:sp>
       <p:sp>
         <p:nvSpPr>
-          <p:cNvPr id="1313184887" name="Notes Placeholder 4"/>
+          <p:cNvPr id="472025022" name="Notes Placeholder 4"/>
           <p:cNvSpPr>
             <a:spLocks noGrp="1"/>
           </p:cNvSpPr>
@@ -323,7 +323,7 @@
       </p:sp>
       <p:sp>
         <p:nvSpPr>
-          <p:cNvPr id="1040689979" name="Footer Placeholder 5"/>
+          <p:cNvPr id="1513584976" name="Footer Placeholder 5"/>
           <p:cNvSpPr>
             <a:spLocks noGrp="1"/>
           </p:cNvSpPr>
@@ -357,7 +357,7 @@
       </p:sp>
       <p:sp>
         <p:nvSpPr>
-          <p:cNvPr id="2108252570" name="Slide Number Placeholder 6"/>
+          <p:cNvPr id="1464022107" name="Slide Number Placeholder 6"/>
           <p:cNvSpPr>
             <a:spLocks noGrp="1"/>
           </p:cNvSpPr>
@@ -510,7 +510,7 @@
       </p:grpSpPr>
       <p:sp>
         <p:nvSpPr>
-          <p:cNvPr id="1455957014" name="Slide Image Placeholder 1"/>
+          <p:cNvPr id="2118831480" name="Slide Image Placeholder 1"/>
           <p:cNvSpPr>
             <a:spLocks noChangeAspect="1" noGrp="1" noRot="1"/>
           </p:cNvSpPr>
@@ -527,7 +527,7 @@
       </p:sp>
       <p:sp>
         <p:nvSpPr>
-          <p:cNvPr id="279129545" name="Notes Placeholder 2"/>
+          <p:cNvPr id="1287383210" name="Notes Placeholder 2"/>
           <p:cNvSpPr>
             <a:spLocks noGrp="1"/>
           </p:cNvSpPr>
@@ -543,7 +543,21 @@
             <a:pPr>
               <a:defRPr/>
             </a:pPr>
-            <a:endParaRPr lang="en-US">
+            <a:r>
+              <a:rPr lang="en-US" sz="2200">
+                <a:latin typeface="Arial"/>
+                <a:cs typeface="Arial"/>
+              </a:rPr>
+              <a:t>Buna ziua, numele meu este Predescu Theodor si astazi va voi prezenta aplicatia mea, care reprezinta un sistem de detectie a evenimentelor</a:t>
+            </a:r>
+            <a:r>
+              <a:rPr lang="en-US" sz="2200">
+                <a:latin typeface="Arial"/>
+                <a:cs typeface="Arial"/>
+              </a:rPr>
+              <a:t> de intruziune</a:t>
+            </a:r>
+            <a:endParaRPr lang="en-US" sz="2200">
               <a:latin typeface="Arial"/>
               <a:cs typeface="Arial"/>
             </a:endParaRPr>
@@ -552,7 +566,7 @@
       </p:sp>
       <p:sp>
         <p:nvSpPr>
-          <p:cNvPr id="1758911899" name="Slide Number Placeholder 3"/>
+          <p:cNvPr id="1202758028" name="Slide Number Placeholder 3"/>
           <p:cNvSpPr>
             <a:spLocks noGrp="1"/>
           </p:cNvSpPr>
@@ -603,7 +617,7 @@
       </p:grpSpPr>
       <p:sp>
         <p:nvSpPr>
-          <p:cNvPr id="2" name="Slide Image Placeholder 1"/>
+          <p:cNvPr id="661526422" name="Slide Image Placeholder 1"/>
           <p:cNvSpPr>
             <a:spLocks noChangeAspect="1" noGrp="1" noRot="1"/>
           </p:cNvSpPr>
@@ -615,7 +629,7 @@
       </p:sp>
       <p:sp>
         <p:nvSpPr>
-          <p:cNvPr id="3" name="Notes Placeholder 2"/>
+          <p:cNvPr id="1266364710" name="Notes Placeholder 2"/>
           <p:cNvSpPr>
             <a:spLocks noGrp="1"/>
           </p:cNvSpPr>
@@ -631,13 +645,47 @@
             <a:pPr>
               <a:defRPr/>
             </a:pPr>
-            <a:endParaRPr/>
-          </a:p>
-        </p:txBody>
-      </p:sp>
-      <p:sp>
-        <p:nvSpPr>
-          <p:cNvPr id="4" name="Slide Number Placeholder 3"/>
+            <a:r>
+              <a:rPr lang="en-US" sz="1800"/>
+              <a:t>Ca si mediu de lucru, aplicatia este destinata mediului industrial, unde se doreste ca traficul dintre dispozitive sa fie cat mai controlat.</a:t>
+            </a:r>
+            <a:endParaRPr lang="en-US" sz="1800"/>
+          </a:p>
+          <a:p>
+            <a:pPr>
+              <a:defRPr/>
+            </a:pPr>
+            <a:endParaRPr sz="1800"/>
+          </a:p>
+          <a:p>
+            <a:pPr>
+              <a:defRPr/>
+            </a:pPr>
+            <a:r>
+              <a:rPr lang="en-US" sz="1800"/>
+              <a:t>Odata cu cresterea conectivitatii si a unei nevoi de integrare cu retele externe, cerintele de securitate au devenit din ce in ce mai complexe, iar</a:t>
+            </a:r>
+            <a:endParaRPr lang="en-US" sz="1800"/>
+          </a:p>
+          <a:p>
+            <a:pPr>
+              <a:defRPr/>
+            </a:pPr>
+            <a:r>
+              <a:rPr lang="en-US" sz="1800"/>
+              <a:t>Studii asupra protocoalelor industriale, cum ar fi studii a traficului ce utilizeaza protocolul Modbus, arata o crestere</a:t>
+            </a:r>
+            <a:r>
+              <a:rPr lang="en-US" sz="1800"/>
+              <a:t> a activitatii de scanare a retelelor din ultimii ani, ceea ce arata o expunere mult mai mare la intruziuni, iar multe din aceste protocoale nu au fost create pe baza ideii de protectie impotriva acestor noi scenarii. </a:t>
+            </a:r>
+            <a:endParaRPr lang="en-US" sz="1800"/>
+          </a:p>
+        </p:txBody>
+      </p:sp>
+      <p:sp>
+        <p:nvSpPr>
+          <p:cNvPr id="986739890" name="Slide Number Placeholder 3"/>
           <p:cNvSpPr>
             <a:spLocks noGrp="1"/>
           </p:cNvSpPr>
@@ -688,7 +736,7 @@
       </p:grpSpPr>
       <p:sp>
         <p:nvSpPr>
-          <p:cNvPr id="2" name="Slide Image Placeholder 1"/>
+          <p:cNvPr id="504195063" name="Slide Image Placeholder 1"/>
           <p:cNvSpPr>
             <a:spLocks noChangeAspect="1" noGrp="1" noRot="1"/>
           </p:cNvSpPr>
@@ -700,7 +748,7 @@
       </p:sp>
       <p:sp>
         <p:nvSpPr>
-          <p:cNvPr id="3" name="Notes Placeholder 2"/>
+          <p:cNvPr id="2054589432" name="Notes Placeholder 2"/>
           <p:cNvSpPr>
             <a:spLocks noGrp="1"/>
           </p:cNvSpPr>
@@ -716,13 +764,34 @@
             <a:pPr>
               <a:defRPr/>
             </a:pPr>
-            <a:endParaRPr/>
-          </a:p>
-        </p:txBody>
-      </p:sp>
-      <p:sp>
-        <p:nvSpPr>
-          <p:cNvPr id="4" name="Slide Number Placeholder 3"/>
+            <a:r>
+              <a:rPr lang="en-US" sz="2000" b="0" i="0" u="none" strike="noStrike" cap="none" spc="0">
+                <a:solidFill>
+                  <a:schemeClr val="tx1"/>
+                </a:solidFill>
+                <a:latin typeface="+mn-lt"/>
+                <a:ea typeface="+mn-ea"/>
+                <a:cs typeface="+mn-cs"/>
+              </a:rPr>
+              <a:t>De aceea sunt necesare solutii suplimentare care sa poata functiona impreuna cu aceste protocoale fara a le afecta punctele lor forte.</a:t>
+            </a:r>
+            <a:endParaRPr/>
+          </a:p>
+          <a:p>
+            <a:pPr>
+              <a:defRPr/>
+            </a:pPr>
+            <a:r>
+              <a:rPr lang="en-US" sz="2000"/>
+              <a:t>Aplicatia propusa ofera un mecanism de monitorizare si filtrare a traficului, adaptat mediului industrial, cu scopul de a creste nivelul de control si de securitate al comunicatiei.</a:t>
+            </a:r>
+            <a:endParaRPr lang="en-US" sz="2000"/>
+          </a:p>
+        </p:txBody>
+      </p:sp>
+      <p:sp>
+        <p:nvSpPr>
+          <p:cNvPr id="654573432" name="Slide Number Placeholder 3"/>
           <p:cNvSpPr>
             <a:spLocks noGrp="1"/>
           </p:cNvSpPr>
@@ -773,7 +842,7 @@
       </p:grpSpPr>
       <p:sp>
         <p:nvSpPr>
-          <p:cNvPr id="2" name="Slide Image Placeholder 1"/>
+          <p:cNvPr id="1898464931" name="Slide Image Placeholder 1"/>
           <p:cNvSpPr>
             <a:spLocks noChangeAspect="1" noGrp="1" noRot="1"/>
           </p:cNvSpPr>
@@ -785,7 +854,7 @@
       </p:sp>
       <p:sp>
         <p:nvSpPr>
-          <p:cNvPr id="3" name="Notes Placeholder 2"/>
+          <p:cNvPr id="363911385" name="Notes Placeholder 2"/>
           <p:cNvSpPr>
             <a:spLocks noGrp="1"/>
           </p:cNvSpPr>
@@ -801,13 +870,17 @@
             <a:pPr>
               <a:defRPr/>
             </a:pPr>
-            <a:endParaRPr/>
-          </a:p>
-        </p:txBody>
-      </p:sp>
-      <p:sp>
-        <p:nvSpPr>
-          <p:cNvPr id="4" name="Slide Number Placeholder 3"/>
+            <a:r>
+              <a:rPr lang="en-US" sz="2000"/>
+              <a:t>Aplicatia este bazata pe definirea explicita a conexiunilor permise in retea, si ofera posibilitatea de vizualizare a traficului si de modificare a configuratiilor. Solutia se bazeaza pe frameworkul Netfiler din sisteme de operare Linux pentru a intercepta, extrage informatii si a oferi posibilitatea de a refuza comunicarea. Informatii din pachetele sunt trimise apoi mai departe unei aplicatii desktop pentru vizualizare text dar si grafica, aceasta aplicatie reprezentand interfata administratorului, care are posibilitate de a modifica regulile de pe toate dispozitivele.</a:t>
+            </a:r>
+            <a:endParaRPr/>
+          </a:p>
+        </p:txBody>
+      </p:sp>
+      <p:sp>
+        <p:nvSpPr>
+          <p:cNvPr id="1729132587" name="Slide Number Placeholder 3"/>
           <p:cNvSpPr>
             <a:spLocks noGrp="1"/>
           </p:cNvSpPr>
@@ -858,7 +931,7 @@
       </p:grpSpPr>
       <p:sp>
         <p:nvSpPr>
-          <p:cNvPr id="1039311141" name="Slide Image Placeholder 1"/>
+          <p:cNvPr id="1342614179" name="Slide Image Placeholder 1"/>
           <p:cNvSpPr>
             <a:spLocks noChangeAspect="1" noGrp="1" noRot="1"/>
           </p:cNvSpPr>
@@ -870,7 +943,7 @@
       </p:sp>
       <p:sp>
         <p:nvSpPr>
-          <p:cNvPr id="1155554794" name="Notes Placeholder 2"/>
+          <p:cNvPr id="1350893811" name="Notes Placeholder 2"/>
           <p:cNvSpPr>
             <a:spLocks noGrp="1"/>
           </p:cNvSpPr>
@@ -886,13 +959,57 @@
             <a:pPr>
               <a:defRPr/>
             </a:pPr>
-            <a:endParaRPr/>
-          </a:p>
-        </p:txBody>
-      </p:sp>
-      <p:sp>
-        <p:nvSpPr>
-          <p:cNvPr id="922332996" name="Slide Number Placeholder 3"/>
+            <a:r>
+              <a:rPr lang="en-US" sz="2200"/>
+              <a:t>Ca si elemente principale, aplicatia este formata din 4 componente</a:t>
+            </a:r>
+            <a:endParaRPr lang="en-US" sz="2200"/>
+          </a:p>
+          <a:p>
+            <a:pPr>
+              <a:defRPr/>
+            </a:pPr>
+            <a:r>
+              <a:rPr lang="en-US" sz="2200"/>
+              <a:t>O componenta de filtrare, ce reprezinta un modul kernel</a:t>
+            </a:r>
+            <a:endParaRPr lang="en-US" sz="2200"/>
+          </a:p>
+          <a:p>
+            <a:pPr>
+              <a:defRPr/>
+            </a:pPr>
+            <a:r>
+              <a:rPr lang="en-US" sz="2200"/>
+              <a:t>O componenta de intermediere, reprezentanta de un daemon</a:t>
+            </a:r>
+            <a:endParaRPr lang="en-US" sz="2200"/>
+          </a:p>
+          <a:p>
+            <a:pPr>
+              <a:defRPr/>
+            </a:pPr>
+            <a:r>
+              <a:rPr lang="en-US" sz="2200"/>
+              <a:t>Componenta centrala, serverul aplicatiei</a:t>
+            </a:r>
+            <a:endParaRPr lang="en-US" sz="2200"/>
+          </a:p>
+          <a:p>
+            <a:pPr>
+              <a:defRPr/>
+            </a:pPr>
+            <a:r>
+              <a:rPr lang="en-US" sz="2200"/>
+              <a:t>Si componenta de administrare, anume aplicatia desktop</a:t>
+            </a:r>
+            <a:endParaRPr lang="en-US" sz="2200"/>
+          </a:p>
+        </p:txBody>
+      </p:sp>
+      <p:sp>
+        <p:nvSpPr>
+          <p:cNvPr id="806328601" name="Slide Number Placeholder 3"/>
           <p:cNvSpPr>
             <a:spLocks noGrp="1"/>
           </p:cNvSpPr>
@@ -943,7 +1060,7 @@
       </p:grpSpPr>
       <p:sp>
         <p:nvSpPr>
-          <p:cNvPr id="238536184" name="Slide Image Placeholder 1"/>
+          <p:cNvPr id="753039683" name="Slide Image Placeholder 1"/>
           <p:cNvSpPr>
             <a:spLocks noChangeAspect="1" noGrp="1" noRot="1"/>
           </p:cNvSpPr>
@@ -955,7 +1072,7 @@
       </p:sp>
       <p:sp>
         <p:nvSpPr>
-          <p:cNvPr id="1290928818" name="Notes Placeholder 2"/>
+          <p:cNvPr id="10884351" name="Notes Placeholder 2"/>
           <p:cNvSpPr>
             <a:spLocks noGrp="1"/>
           </p:cNvSpPr>
@@ -971,13 +1088,196 @@
             <a:pPr>
               <a:defRPr/>
             </a:pPr>
-            <a:endParaRPr/>
-          </a:p>
-        </p:txBody>
-      </p:sp>
-      <p:sp>
-        <p:nvSpPr>
-          <p:cNvPr id="776111289" name="Slide Number Placeholder 3"/>
+            <a:r>
+              <a:rPr lang="en-US" sz="1800" b="0" i="0" u="none" strike="noStrike" cap="none" spc="0">
+                <a:solidFill>
+                  <a:schemeClr val="tx1"/>
+                </a:solidFill>
+                <a:latin typeface="+mn-lt"/>
+                <a:ea typeface="+mn-ea"/>
+                <a:cs typeface="+mn-cs"/>
+              </a:rPr>
+              <a:t>Aplicatia poate functiona in 4 moduri:</a:t>
+            </a:r>
+            <a:endParaRPr lang="en-US" sz="1800" b="0" i="0" u="none" strike="noStrike" cap="none" spc="0">
+              <a:solidFill>
+                <a:schemeClr val="tx1"/>
+              </a:solidFill>
+              <a:latin typeface="Times New Roman"/>
+              <a:cs typeface="Times New Roman"/>
+            </a:endParaRPr>
+          </a:p>
+          <a:p>
+            <a:pPr>
+              <a:defRPr/>
+            </a:pPr>
+            <a:r>
+              <a:rPr lang="en-US" sz="1800" b="0" i="0" u="none" strike="noStrike" cap="none" spc="0">
+                <a:solidFill>
+                  <a:schemeClr val="tx1"/>
+                </a:solidFill>
+                <a:latin typeface="Arial"/>
+                <a:ea typeface="Arial"/>
+                <a:cs typeface="Arial"/>
+              </a:rPr>
+              <a:t>Permisiv, in care raporteaza conexiunile nepermise, dar nu le blocheaza</a:t>
+            </a:r>
+            <a:endParaRPr lang="en-US" sz="1800" b="0" i="0" u="none" strike="noStrike" cap="none" spc="0">
+              <a:solidFill>
+                <a:schemeClr val="tx1"/>
+              </a:solidFill>
+              <a:latin typeface="Times New Roman"/>
+              <a:cs typeface="Times New Roman"/>
+            </a:endParaRPr>
+          </a:p>
+          <a:p>
+            <a:pPr>
+              <a:defRPr/>
+            </a:pPr>
+            <a:r>
+              <a:rPr lang="en-US" sz="1800" b="0" i="0" u="none" strike="noStrike" cap="none" spc="0">
+                <a:solidFill>
+                  <a:schemeClr val="tx1"/>
+                </a:solidFill>
+                <a:latin typeface="Arial"/>
+                <a:ea typeface="Arial"/>
+                <a:cs typeface="Arial"/>
+              </a:rPr>
+              <a:t>Reactiv, in care raporteaza si blocheaza traficul nepermis</a:t>
+            </a:r>
+            <a:endParaRPr lang="en-US" sz="1800" b="0" i="0" u="none" strike="noStrike" cap="none" spc="0">
+              <a:solidFill>
+                <a:schemeClr val="tx1"/>
+              </a:solidFill>
+              <a:latin typeface="Times New Roman"/>
+              <a:cs typeface="Times New Roman"/>
+            </a:endParaRPr>
+          </a:p>
+          <a:p>
+            <a:pPr>
+              <a:defRPr/>
+            </a:pPr>
+            <a:r>
+              <a:rPr lang="en-US" sz="1800" b="0" i="0" u="none" strike="noStrike" cap="none" spc="0">
+                <a:solidFill>
+                  <a:schemeClr val="tx1"/>
+                </a:solidFill>
+                <a:latin typeface="Arial"/>
+                <a:ea typeface="Arial"/>
+                <a:cs typeface="Arial"/>
+              </a:rPr>
+              <a:t>Dezactivat, in care nu raporteaza si nu blocheaza</a:t>
+            </a:r>
+            <a:endParaRPr lang="en-US" sz="1800" b="0" i="0" u="none" strike="noStrike" cap="none" spc="0">
+              <a:solidFill>
+                <a:schemeClr val="tx1"/>
+              </a:solidFill>
+              <a:latin typeface="Times New Roman"/>
+              <a:cs typeface="Times New Roman"/>
+            </a:endParaRPr>
+          </a:p>
+          <a:p>
+            <a:pPr>
+              <a:defRPr/>
+            </a:pPr>
+            <a:r>
+              <a:rPr lang="en-US" sz="1800" b="0" i="0" u="none" strike="noStrike" cap="none" spc="0">
+                <a:solidFill>
+                  <a:schemeClr val="tx1"/>
+                </a:solidFill>
+                <a:latin typeface="Arial"/>
+                <a:ea typeface="Arial"/>
+                <a:cs typeface="Arial"/>
+              </a:rPr>
+              <a:t>Si modul de antrenare, mod folosit pentru definire a traficului permis, in care toate conexiunile care au fost inregistrate sunt adaugate automat in lista de conexiuni permise</a:t>
+            </a:r>
+            <a:endParaRPr lang="en-US" sz="1800" b="0" i="0" u="none" strike="noStrike" cap="none" spc="0">
+              <a:solidFill>
+                <a:schemeClr val="tx1"/>
+              </a:solidFill>
+              <a:latin typeface="Times New Roman"/>
+              <a:cs typeface="Times New Roman"/>
+            </a:endParaRPr>
+          </a:p>
+          <a:p>
+            <a:pPr>
+              <a:defRPr/>
+            </a:pPr>
+            <a:endParaRPr lang="en-US" sz="1800" b="0" i="0" u="none" strike="noStrike" cap="none" spc="0">
+              <a:solidFill>
+                <a:schemeClr val="tx1"/>
+              </a:solidFill>
+              <a:latin typeface="Times New Roman"/>
+              <a:cs typeface="Times New Roman"/>
+            </a:endParaRPr>
+          </a:p>
+          <a:p>
+            <a:pPr>
+              <a:defRPr/>
+            </a:pPr>
+            <a:r>
+              <a:rPr lang="en-US" sz="1800" b="0" i="0" u="none" strike="noStrike" cap="none" spc="0">
+                <a:solidFill>
+                  <a:schemeClr val="tx1"/>
+                </a:solidFill>
+                <a:latin typeface="+mn-lt"/>
+                <a:ea typeface="+mn-ea"/>
+                <a:cs typeface="+mn-cs"/>
+              </a:rPr>
+              <a:t>Deci modulul kernel, care face filtrarea pe baza regulilor de trafic, stocate local pentru acces rapid</a:t>
+            </a:r>
+            <a:r>
+              <a:rPr lang="en-US" sz="1800" b="0" i="0" u="none" strike="noStrike" cap="none" spc="0">
+                <a:solidFill>
+                  <a:schemeClr val="tx1"/>
+                </a:solidFill>
+                <a:latin typeface="+mn-lt"/>
+                <a:ea typeface="+mn-ea"/>
+                <a:cs typeface="+mn-cs"/>
+              </a:rPr>
+              <a:t>.</a:t>
+            </a:r>
+            <a:endParaRPr sz="1800"/>
+          </a:p>
+          <a:p>
+            <a:pPr>
+              <a:defRPr/>
+            </a:pPr>
+            <a:r>
+              <a:rPr lang="en-US" sz="1800" b="0" i="0" u="none" strike="noStrike" cap="none" spc="0">
+                <a:solidFill>
+                  <a:schemeClr val="tx1"/>
+                </a:solidFill>
+                <a:latin typeface="+mn-lt"/>
+                <a:ea typeface="+mn-ea"/>
+                <a:cs typeface="+mn-cs"/>
+              </a:rPr>
+              <a:t>Intre modulul kernel si restul sistemului se afla un daemon de intermediere, care sincronizeaza regulile si transmite informatiile despre pachete catre server.</a:t>
+            </a:r>
+            <a:endParaRPr sz="1800"/>
+          </a:p>
+          <a:p>
+            <a:pPr>
+              <a:defRPr/>
+            </a:pPr>
+            <a:r>
+              <a:rPr lang="en-US" sz="1800" b="0" i="0" u="none" strike="noStrike" cap="none" spc="0">
+                <a:solidFill>
+                  <a:schemeClr val="tx1"/>
+                </a:solidFill>
+                <a:latin typeface="+mn-lt"/>
+                <a:ea typeface="+mn-ea"/>
+                <a:cs typeface="+mn-cs"/>
+              </a:rPr>
+              <a:t>componenta centrala, serverul, care colecteaza informatii de la toate dispozitivele, face o scurta prelucrare a lor si trimite informatiile componentei de administrare, din care se poate vizualizarea si modifica configurarea dispozitivelor.</a:t>
+            </a:r>
+            <a:endParaRPr sz="1800"/>
+          </a:p>
+        </p:txBody>
+      </p:sp>
+      <p:sp>
+        <p:nvSpPr>
+          <p:cNvPr id="1214800622" name="Slide Number Placeholder 3"/>
           <p:cNvSpPr>
             <a:spLocks noGrp="1"/>
           </p:cNvSpPr>
@@ -1028,7 +1328,7 @@
       </p:grpSpPr>
       <p:sp>
         <p:nvSpPr>
-          <p:cNvPr id="1953926601" name="Slide Image Placeholder 1"/>
+          <p:cNvPr id="491924599" name="Slide Image Placeholder 1"/>
           <p:cNvSpPr>
             <a:spLocks noChangeAspect="1" noGrp="1" noRot="1"/>
           </p:cNvSpPr>
@@ -1040,7 +1340,7 @@
       </p:sp>
       <p:sp>
         <p:nvSpPr>
-          <p:cNvPr id="329087228" name="Notes Placeholder 2"/>
+          <p:cNvPr id="1195736864" name="Notes Placeholder 2"/>
           <p:cNvSpPr>
             <a:spLocks noGrp="1"/>
           </p:cNvSpPr>
@@ -1062,7 +1362,7 @@
       </p:sp>
       <p:sp>
         <p:nvSpPr>
-          <p:cNvPr id="2015722091" name="Slide Number Placeholder 3"/>
+          <p:cNvPr id="1221799108" name="Slide Number Placeholder 3"/>
           <p:cNvSpPr>
             <a:spLocks noGrp="1"/>
           </p:cNvSpPr>
@@ -1113,7 +1413,7 @@
       </p:grpSpPr>
       <p:sp>
         <p:nvSpPr>
-          <p:cNvPr id="423790390" name="Slide Image Placeholder 1"/>
+          <p:cNvPr id="425248221" name="Slide Image Placeholder 1"/>
           <p:cNvSpPr>
             <a:spLocks noChangeAspect="1" noGrp="1" noRot="1"/>
           </p:cNvSpPr>
@@ -1125,7 +1425,7 @@
       </p:sp>
       <p:sp>
         <p:nvSpPr>
-          <p:cNvPr id="1082532789" name="Notes Placeholder 2"/>
+          <p:cNvPr id="531319324" name="Notes Placeholder 2"/>
           <p:cNvSpPr>
             <a:spLocks noGrp="1"/>
           </p:cNvSpPr>
@@ -1147,7 +1447,7 @@
       </p:sp>
       <p:sp>
         <p:nvSpPr>
-          <p:cNvPr id="370650620" name="Slide Number Placeholder 3"/>
+          <p:cNvPr id="475226690" name="Slide Number Placeholder 3"/>
           <p:cNvSpPr>
             <a:spLocks noGrp="1"/>
           </p:cNvSpPr>
@@ -1198,7 +1498,7 @@
       </p:grpSpPr>
       <p:sp>
         <p:nvSpPr>
-          <p:cNvPr id="478777327" name="Shape 1059"/>
+          <p:cNvPr id="1710339885" name="Shape 1059"/>
           <p:cNvSpPr>
             <a:spLocks noChangeArrowheads="1" noGrp="1"/>
           </p:cNvSpPr>
@@ -1321,7 +1621,7 @@
       </p:sp>
       <p:sp>
         <p:nvSpPr>
-          <p:cNvPr id="1951129950" name="Shape 1060"/>
+          <p:cNvPr id="1853561115" name="Shape 1060"/>
           <p:cNvSpPr>
             <a:spLocks noChangeArrowheads="1" noGrp="1"/>
           </p:cNvSpPr>
@@ -1330,7 +1630,7 @@
         <p:spPr bwMode="auto">
           <a:xfrm>
             <a:off x="1309514" y="1839834"/>
-            <a:ext cx="4011787" cy="1314325"/>
+            <a:ext cx="4011787" cy="1314324"/>
           </a:xfrm>
           <a:custGeom>
             <a:avLst/>
@@ -1412,7 +1712,7 @@
       </p:sp>
       <p:sp>
         <p:nvSpPr>
-          <p:cNvPr id="1888033036" name="Shape 1061"/>
+          <p:cNvPr id="1754533790" name="Shape 1061"/>
           <p:cNvSpPr>
             <a:spLocks noChangeArrowheads="1" noGrp="1"/>
           </p:cNvSpPr>
@@ -1420,7 +1720,7 @@
         </p:nvSpPr>
         <p:spPr bwMode="auto">
           <a:xfrm>
-            <a:off x="6567031" y="4629133"/>
+            <a:off x="6567030" y="4629133"/>
             <a:ext cx="5395523" cy="2231707"/>
           </a:xfrm>
           <a:custGeom>
@@ -1498,7 +1798,7 @@
       </p:sp>
       <p:sp>
         <p:nvSpPr>
-          <p:cNvPr id="143407358" name="Shape 1062"/>
+          <p:cNvPr id="1064200702" name="Shape 1062"/>
           <p:cNvSpPr>
             <a:spLocks noChangeArrowheads="1" noGrp="1"/>
           </p:cNvSpPr>
@@ -1576,7 +1876,7 @@
       </p:sp>
       <p:sp>
         <p:nvSpPr>
-          <p:cNvPr id="99086581" name="Shape 1063"/>
+          <p:cNvPr id="975453241" name="Shape 1063"/>
           <p:cNvSpPr>
             <a:spLocks noChangeArrowheads="1" noGrp="1"/>
           </p:cNvSpPr>
@@ -1654,7 +1954,7 @@
       </p:sp>
       <p:sp>
         <p:nvSpPr>
-          <p:cNvPr id="23761040" name="Subtitle 2"/>
+          <p:cNvPr id="93491606" name="Subtitle 2"/>
           <p:cNvSpPr>
             <a:spLocks noGrp="1"/>
           </p:cNvSpPr>
@@ -1665,7 +1965,7 @@
         <p:spPr bwMode="auto">
           <a:xfrm>
             <a:off x="4655839" y="2708919"/>
-            <a:ext cx="6720746" cy="720079"/>
+            <a:ext cx="6720745" cy="720079"/>
           </a:xfrm>
         </p:spPr>
         <p:txBody>
@@ -1777,7 +2077,7 @@
       </p:sp>
       <p:sp>
         <p:nvSpPr>
-          <p:cNvPr id="616193731" name="Date Placeholder 3"/>
+          <p:cNvPr id="418768368" name="Date Placeholder 3"/>
           <p:cNvSpPr>
             <a:spLocks noGrp="1"/>
           </p:cNvSpPr>
@@ -1803,7 +2103,7 @@
       </p:sp>
       <p:sp>
         <p:nvSpPr>
-          <p:cNvPr id="1612020932" name="Footer Placeholder 4"/>
+          <p:cNvPr id="1980397378" name="Footer Placeholder 4"/>
           <p:cNvSpPr>
             <a:spLocks noGrp="1"/>
           </p:cNvSpPr>
@@ -1825,7 +2125,7 @@
       </p:sp>
       <p:sp>
         <p:nvSpPr>
-          <p:cNvPr id="1045710637" name="Slide Number Placeholder 5"/>
+          <p:cNvPr id="304051835" name="Slide Number Placeholder 5"/>
           <p:cNvSpPr>
             <a:spLocks noGrp="1"/>
           </p:cNvSpPr>
@@ -1851,7 +2151,7 @@
       </p:sp>
       <p:sp>
         <p:nvSpPr>
-          <p:cNvPr id="1870003737" name="Title 6"/>
+          <p:cNvPr id="2000596707" name="Title 6"/>
           <p:cNvSpPr>
             <a:spLocks noGrp="1"/>
           </p:cNvSpPr>
@@ -1862,7 +2162,7 @@
         <p:spPr bwMode="auto">
           <a:xfrm>
             <a:off x="4595833" y="1808820"/>
-            <a:ext cx="6720746" cy="720079"/>
+            <a:ext cx="6720745" cy="720079"/>
           </a:xfrm>
         </p:spPr>
         <p:txBody>
@@ -1911,7 +2211,7 @@
       </p:grpSpPr>
       <p:sp>
         <p:nvSpPr>
-          <p:cNvPr id="2108503516" name="Title 1"/>
+          <p:cNvPr id="798376248" name="Title 1"/>
           <p:cNvSpPr>
             <a:spLocks noGrp="1"/>
           </p:cNvSpPr>
@@ -1937,7 +2237,7 @@
       </p:sp>
       <p:sp>
         <p:nvSpPr>
-          <p:cNvPr id="887151760" name="Vertical Text Placeholder 2"/>
+          <p:cNvPr id="2002113777" name="Vertical Text Placeholder 2"/>
           <p:cNvSpPr>
             <a:spLocks noGrp="1"/>
           </p:cNvSpPr>
@@ -2003,7 +2303,7 @@
       </p:sp>
       <p:sp>
         <p:nvSpPr>
-          <p:cNvPr id="1746112388" name="Date Placeholder 3"/>
+          <p:cNvPr id="392931532" name="Date Placeholder 3"/>
           <p:cNvSpPr>
             <a:spLocks noGrp="1"/>
           </p:cNvSpPr>
@@ -2029,7 +2329,7 @@
       </p:sp>
       <p:sp>
         <p:nvSpPr>
-          <p:cNvPr id="1374159287" name="Footer Placeholder 4"/>
+          <p:cNvPr id="1297089959" name="Footer Placeholder 4"/>
           <p:cNvSpPr>
             <a:spLocks noGrp="1"/>
           </p:cNvSpPr>
@@ -2051,7 +2351,7 @@
       </p:sp>
       <p:sp>
         <p:nvSpPr>
-          <p:cNvPr id="931385939" name="Slide Number Placeholder 5"/>
+          <p:cNvPr id="512872040" name="Slide Number Placeholder 5"/>
           <p:cNvSpPr>
             <a:spLocks noGrp="1"/>
           </p:cNvSpPr>
@@ -2102,7 +2402,7 @@
       </p:grpSpPr>
       <p:sp>
         <p:nvSpPr>
-          <p:cNvPr id="400432376" name="Vertical Title 1"/>
+          <p:cNvPr id="919710934" name="Vertical Title 1"/>
           <p:cNvSpPr>
             <a:spLocks noGrp="1"/>
           </p:cNvSpPr>
@@ -2137,7 +2437,7 @@
       </p:sp>
       <p:sp>
         <p:nvSpPr>
-          <p:cNvPr id="1479244709" name="Vertical Text Placeholder 2"/>
+          <p:cNvPr id="1244660427" name="Vertical Text Placeholder 2"/>
           <p:cNvSpPr>
             <a:spLocks noGrp="1"/>
           </p:cNvSpPr>
@@ -2208,7 +2508,7 @@
       </p:sp>
       <p:sp>
         <p:nvSpPr>
-          <p:cNvPr id="972811097" name="Date Placeholder 3"/>
+          <p:cNvPr id="221825086" name="Date Placeholder 3"/>
           <p:cNvSpPr>
             <a:spLocks noGrp="1"/>
           </p:cNvSpPr>
@@ -2234,7 +2534,7 @@
       </p:sp>
       <p:sp>
         <p:nvSpPr>
-          <p:cNvPr id="1229519651" name="Footer Placeholder 4"/>
+          <p:cNvPr id="126987352" name="Footer Placeholder 4"/>
           <p:cNvSpPr>
             <a:spLocks noGrp="1"/>
           </p:cNvSpPr>
@@ -2256,7 +2556,7 @@
       </p:sp>
       <p:sp>
         <p:nvSpPr>
-          <p:cNvPr id="59572405" name="Slide Number Placeholder 5"/>
+          <p:cNvPr id="2101319701" name="Slide Number Placeholder 5"/>
           <p:cNvSpPr>
             <a:spLocks noGrp="1"/>
           </p:cNvSpPr>
@@ -2307,7 +2607,7 @@
       </p:grpSpPr>
       <p:sp>
         <p:nvSpPr>
-          <p:cNvPr id="1680946030" name="Title 1"/>
+          <p:cNvPr id="897445798" name="Title 1"/>
           <p:cNvSpPr>
             <a:spLocks noGrp="1"/>
           </p:cNvSpPr>
@@ -2333,7 +2633,7 @@
       </p:sp>
       <p:sp>
         <p:nvSpPr>
-          <p:cNvPr id="671778876" name="Content Placeholder 2"/>
+          <p:cNvPr id="560023077" name="Content Placeholder 2"/>
           <p:cNvSpPr>
             <a:spLocks noGrp="1"/>
           </p:cNvSpPr>
@@ -2399,7 +2699,7 @@
       </p:sp>
       <p:sp>
         <p:nvSpPr>
-          <p:cNvPr id="1039548778" name="Date Placeholder 3"/>
+          <p:cNvPr id="69601634" name="Date Placeholder 3"/>
           <p:cNvSpPr>
             <a:spLocks noGrp="1"/>
           </p:cNvSpPr>
@@ -2425,7 +2725,7 @@
       </p:sp>
       <p:sp>
         <p:nvSpPr>
-          <p:cNvPr id="1937745477" name="Footer Placeholder 4"/>
+          <p:cNvPr id="1467689833" name="Footer Placeholder 4"/>
           <p:cNvSpPr>
             <a:spLocks noGrp="1"/>
           </p:cNvSpPr>
@@ -2447,7 +2747,7 @@
       </p:sp>
       <p:sp>
         <p:nvSpPr>
-          <p:cNvPr id="755132606" name="Slide Number Placeholder 5"/>
+          <p:cNvPr id="785538655" name="Slide Number Placeholder 5"/>
           <p:cNvSpPr>
             <a:spLocks noGrp="1"/>
           </p:cNvSpPr>
@@ -2498,7 +2798,7 @@
       </p:grpSpPr>
       <p:sp>
         <p:nvSpPr>
-          <p:cNvPr id="150591838" name="Title 1"/>
+          <p:cNvPr id="1331064045" name="Title 1"/>
           <p:cNvSpPr>
             <a:spLocks noGrp="1"/>
           </p:cNvSpPr>
@@ -2533,7 +2833,7 @@
       </p:sp>
       <p:sp>
         <p:nvSpPr>
-          <p:cNvPr id="1870944077" name="Text Placeholder 2"/>
+          <p:cNvPr id="1217984179" name="Text Placeholder 2"/>
           <p:cNvSpPr>
             <a:spLocks noGrp="1"/>
           </p:cNvSpPr>
@@ -2655,7 +2955,7 @@
       </p:sp>
       <p:sp>
         <p:nvSpPr>
-          <p:cNvPr id="2056927335" name="Date Placeholder 3"/>
+          <p:cNvPr id="1935683632" name="Date Placeholder 3"/>
           <p:cNvSpPr>
             <a:spLocks noGrp="1"/>
           </p:cNvSpPr>
@@ -2681,7 +2981,7 @@
       </p:sp>
       <p:sp>
         <p:nvSpPr>
-          <p:cNvPr id="1531490529" name="Footer Placeholder 4"/>
+          <p:cNvPr id="2057161644" name="Footer Placeholder 4"/>
           <p:cNvSpPr>
             <a:spLocks noGrp="1"/>
           </p:cNvSpPr>
@@ -2703,7 +3003,7 @@
       </p:sp>
       <p:sp>
         <p:nvSpPr>
-          <p:cNvPr id="1079545873" name="Slide Number Placeholder 5"/>
+          <p:cNvPr id="2044985659" name="Slide Number Placeholder 5"/>
           <p:cNvSpPr>
             <a:spLocks noGrp="1"/>
           </p:cNvSpPr>
@@ -2754,7 +3054,7 @@
       </p:grpSpPr>
       <p:sp>
         <p:nvSpPr>
-          <p:cNvPr id="1228917532" name="Title 1"/>
+          <p:cNvPr id="1476585091" name="Title 1"/>
           <p:cNvSpPr>
             <a:spLocks noGrp="1"/>
           </p:cNvSpPr>
@@ -2780,7 +3080,7 @@
       </p:sp>
       <p:sp>
         <p:nvSpPr>
-          <p:cNvPr id="1407595424" name="Content Placeholder 2"/>
+          <p:cNvPr id="1823465060" name="Content Placeholder 2"/>
           <p:cNvSpPr>
             <a:spLocks noGrp="1"/>
           </p:cNvSpPr>
@@ -2879,7 +3179,7 @@
       </p:sp>
       <p:sp>
         <p:nvSpPr>
-          <p:cNvPr id="666135410" name="Content Placeholder 3"/>
+          <p:cNvPr id="2113960475" name="Content Placeholder 3"/>
           <p:cNvSpPr>
             <a:spLocks noGrp="1"/>
           </p:cNvSpPr>
@@ -2978,7 +3278,7 @@
       </p:sp>
       <p:sp>
         <p:nvSpPr>
-          <p:cNvPr id="56220260" name="Date Placeholder 4"/>
+          <p:cNvPr id="628111992" name="Date Placeholder 4"/>
           <p:cNvSpPr>
             <a:spLocks noGrp="1"/>
           </p:cNvSpPr>
@@ -3004,7 +3304,7 @@
       </p:sp>
       <p:sp>
         <p:nvSpPr>
-          <p:cNvPr id="1894196336" name="Footer Placeholder 5"/>
+          <p:cNvPr id="1741363594" name="Footer Placeholder 5"/>
           <p:cNvSpPr>
             <a:spLocks noGrp="1"/>
           </p:cNvSpPr>
@@ -3026,7 +3326,7 @@
       </p:sp>
       <p:sp>
         <p:nvSpPr>
-          <p:cNvPr id="1317017759" name="Slide Number Placeholder 6"/>
+          <p:cNvPr id="156814234" name="Slide Number Placeholder 6"/>
           <p:cNvSpPr>
             <a:spLocks noGrp="1"/>
           </p:cNvSpPr>
@@ -3077,7 +3377,7 @@
       </p:grpSpPr>
       <p:sp>
         <p:nvSpPr>
-          <p:cNvPr id="1628948121" name="Title 1"/>
+          <p:cNvPr id="2116529745" name="Title 1"/>
           <p:cNvSpPr>
             <a:spLocks noGrp="1"/>
           </p:cNvSpPr>
@@ -3107,7 +3407,7 @@
       </p:sp>
       <p:sp>
         <p:nvSpPr>
-          <p:cNvPr id="502880849" name="Text Placeholder 2"/>
+          <p:cNvPr id="2018496283" name="Text Placeholder 2"/>
           <p:cNvSpPr>
             <a:spLocks noGrp="1"/>
           </p:cNvSpPr>
@@ -3175,7 +3475,7 @@
       </p:sp>
       <p:sp>
         <p:nvSpPr>
-          <p:cNvPr id="1138802016" name="Content Placeholder 3"/>
+          <p:cNvPr id="596862477" name="Content Placeholder 3"/>
           <p:cNvSpPr>
             <a:spLocks noGrp="1"/>
           </p:cNvSpPr>
@@ -3274,7 +3574,7 @@
       </p:sp>
       <p:sp>
         <p:nvSpPr>
-          <p:cNvPr id="2070765521" name="Text Placeholder 4"/>
+          <p:cNvPr id="1371557740" name="Text Placeholder 4"/>
           <p:cNvSpPr>
             <a:spLocks noGrp="1"/>
           </p:cNvSpPr>
@@ -3342,7 +3642,7 @@
       </p:sp>
       <p:sp>
         <p:nvSpPr>
-          <p:cNvPr id="827728825" name="Content Placeholder 5"/>
+          <p:cNvPr id="958868502" name="Content Placeholder 5"/>
           <p:cNvSpPr>
             <a:spLocks noGrp="1"/>
           </p:cNvSpPr>
@@ -3441,7 +3741,7 @@
       </p:sp>
       <p:sp>
         <p:nvSpPr>
-          <p:cNvPr id="2089167606" name="Date Placeholder 6"/>
+          <p:cNvPr id="2060098897" name="Date Placeholder 6"/>
           <p:cNvSpPr>
             <a:spLocks noGrp="1"/>
           </p:cNvSpPr>
@@ -3467,7 +3767,7 @@
       </p:sp>
       <p:sp>
         <p:nvSpPr>
-          <p:cNvPr id="1907277053" name="Footer Placeholder 7"/>
+          <p:cNvPr id="798921486" name="Footer Placeholder 7"/>
           <p:cNvSpPr>
             <a:spLocks noGrp="1"/>
           </p:cNvSpPr>
@@ -3489,7 +3789,7 @@
       </p:sp>
       <p:sp>
         <p:nvSpPr>
-          <p:cNvPr id="1664622073" name="Slide Number Placeholder 8"/>
+          <p:cNvPr id="1374245685" name="Slide Number Placeholder 8"/>
           <p:cNvSpPr>
             <a:spLocks noGrp="1"/>
           </p:cNvSpPr>
@@ -3540,7 +3840,7 @@
       </p:grpSpPr>
       <p:sp>
         <p:nvSpPr>
-          <p:cNvPr id="1561688012" name="Title 1"/>
+          <p:cNvPr id="1584688903" name="Title 1"/>
           <p:cNvSpPr>
             <a:spLocks noGrp="1"/>
           </p:cNvSpPr>
@@ -3566,7 +3866,7 @@
       </p:sp>
       <p:sp>
         <p:nvSpPr>
-          <p:cNvPr id="307363274" name="Date Placeholder 2"/>
+          <p:cNvPr id="1132244266" name="Date Placeholder 2"/>
           <p:cNvSpPr>
             <a:spLocks noGrp="1"/>
           </p:cNvSpPr>
@@ -3592,7 +3892,7 @@
       </p:sp>
       <p:sp>
         <p:nvSpPr>
-          <p:cNvPr id="1478854503" name="Footer Placeholder 3"/>
+          <p:cNvPr id="1533550676" name="Footer Placeholder 3"/>
           <p:cNvSpPr>
             <a:spLocks noGrp="1"/>
           </p:cNvSpPr>
@@ -3614,7 +3914,7 @@
       </p:sp>
       <p:sp>
         <p:nvSpPr>
-          <p:cNvPr id="133370500" name="Slide Number Placeholder 4"/>
+          <p:cNvPr id="259267463" name="Slide Number Placeholder 4"/>
           <p:cNvSpPr>
             <a:spLocks noGrp="1"/>
           </p:cNvSpPr>
@@ -3665,7 +3965,7 @@
       </p:grpSpPr>
       <p:sp>
         <p:nvSpPr>
-          <p:cNvPr id="2041640864" name="Date Placeholder 1"/>
+          <p:cNvPr id="1522336360" name="Date Placeholder 1"/>
           <p:cNvSpPr>
             <a:spLocks noGrp="1"/>
           </p:cNvSpPr>
@@ -3691,7 +3991,7 @@
       </p:sp>
       <p:sp>
         <p:nvSpPr>
-          <p:cNvPr id="1384332756" name="Footer Placeholder 2"/>
+          <p:cNvPr id="83434217" name="Footer Placeholder 2"/>
           <p:cNvSpPr>
             <a:spLocks noGrp="1"/>
           </p:cNvSpPr>
@@ -3713,7 +4013,7 @@
       </p:sp>
       <p:sp>
         <p:nvSpPr>
-          <p:cNvPr id="109726047" name="Slide Number Placeholder 3"/>
+          <p:cNvPr id="393783880" name="Slide Number Placeholder 3"/>
           <p:cNvSpPr>
             <a:spLocks noGrp="1"/>
           </p:cNvSpPr>
@@ -3764,7 +4064,7 @@
       </p:grpSpPr>
       <p:sp>
         <p:nvSpPr>
-          <p:cNvPr id="2116489321" name="Title 1"/>
+          <p:cNvPr id="185041053" name="Title 1"/>
           <p:cNvSpPr>
             <a:spLocks noGrp="1"/>
           </p:cNvSpPr>
@@ -3799,7 +4099,7 @@
       </p:sp>
       <p:sp>
         <p:nvSpPr>
-          <p:cNvPr id="413408022" name="Content Placeholder 2"/>
+          <p:cNvPr id="1850463331" name="Content Placeholder 2"/>
           <p:cNvSpPr>
             <a:spLocks noGrp="1"/>
           </p:cNvSpPr>
@@ -3898,7 +4198,7 @@
       </p:sp>
       <p:sp>
         <p:nvSpPr>
-          <p:cNvPr id="550328659" name="Text Placeholder 3"/>
+          <p:cNvPr id="1304244565" name="Text Placeholder 3"/>
           <p:cNvSpPr>
             <a:spLocks noGrp="1"/>
           </p:cNvSpPr>
@@ -3966,7 +4266,7 @@
       </p:sp>
       <p:sp>
         <p:nvSpPr>
-          <p:cNvPr id="1757845426" name="Date Placeholder 4"/>
+          <p:cNvPr id="418204710" name="Date Placeholder 4"/>
           <p:cNvSpPr>
             <a:spLocks noGrp="1"/>
           </p:cNvSpPr>
@@ -3992,7 +4292,7 @@
       </p:sp>
       <p:sp>
         <p:nvSpPr>
-          <p:cNvPr id="1830030424" name="Footer Placeholder 5"/>
+          <p:cNvPr id="1796880264" name="Footer Placeholder 5"/>
           <p:cNvSpPr>
             <a:spLocks noGrp="1"/>
           </p:cNvSpPr>
@@ -4014,7 +4314,7 @@
       </p:sp>
       <p:sp>
         <p:nvSpPr>
-          <p:cNvPr id="1917575166" name="Slide Number Placeholder 6"/>
+          <p:cNvPr id="201621686" name="Slide Number Placeholder 6"/>
           <p:cNvSpPr>
             <a:spLocks noGrp="1"/>
           </p:cNvSpPr>
@@ -4065,7 +4365,7 @@
       </p:grpSpPr>
       <p:sp>
         <p:nvSpPr>
-          <p:cNvPr id="1220796216" name="Title 1"/>
+          <p:cNvPr id="1848722928" name="Title 1"/>
           <p:cNvSpPr>
             <a:spLocks noGrp="1"/>
           </p:cNvSpPr>
@@ -4100,7 +4400,7 @@
       </p:sp>
       <p:sp>
         <p:nvSpPr>
-          <p:cNvPr id="1170568644" name="Picture Placeholder 2"/>
+          <p:cNvPr id="1976738741" name="Picture Placeholder 2"/>
           <p:cNvSpPr>
             <a:spLocks noGrp="1"/>
           </p:cNvSpPr>
@@ -4164,7 +4464,7 @@
       </p:sp>
       <p:sp>
         <p:nvSpPr>
-          <p:cNvPr id="126370005" name="Text Placeholder 3"/>
+          <p:cNvPr id="1517193280" name="Text Placeholder 3"/>
           <p:cNvSpPr>
             <a:spLocks noGrp="1"/>
           </p:cNvSpPr>
@@ -4232,7 +4532,7 @@
       </p:sp>
       <p:sp>
         <p:nvSpPr>
-          <p:cNvPr id="164932728" name="Date Placeholder 4"/>
+          <p:cNvPr id="1783526725" name="Date Placeholder 4"/>
           <p:cNvSpPr>
             <a:spLocks noGrp="1"/>
           </p:cNvSpPr>
@@ -4258,7 +4558,7 @@
       </p:sp>
       <p:sp>
         <p:nvSpPr>
-          <p:cNvPr id="697997570" name="Footer Placeholder 5"/>
+          <p:cNvPr id="2085002119" name="Footer Placeholder 5"/>
           <p:cNvSpPr>
             <a:spLocks noGrp="1"/>
           </p:cNvSpPr>
@@ -4280,7 +4580,7 @@
       </p:sp>
       <p:sp>
         <p:nvSpPr>
-          <p:cNvPr id="571166102" name="Slide Number Placeholder 6"/>
+          <p:cNvPr id="1046703242" name="Slide Number Placeholder 6"/>
           <p:cNvSpPr>
             <a:spLocks noGrp="1"/>
           </p:cNvSpPr>
@@ -4336,7 +4636,7 @@
       </p:grpSpPr>
       <p:sp>
         <p:nvSpPr>
-          <p:cNvPr id="1166811205" name="Shape 1059"/>
+          <p:cNvPr id="1362634519" name="Shape 1059"/>
           <p:cNvSpPr>
             <a:spLocks noChangeArrowheads="1" noGrp="1"/>
           </p:cNvSpPr>
@@ -4414,7 +4714,7 @@
       </p:sp>
       <p:sp>
         <p:nvSpPr>
-          <p:cNvPr id="1121951178" name="Shape 1060"/>
+          <p:cNvPr id="905303359" name="Shape 1060"/>
           <p:cNvSpPr>
             <a:spLocks noChangeArrowheads="1" noGrp="1"/>
           </p:cNvSpPr>
@@ -4495,7 +4795,7 @@
       </p:sp>
       <p:sp>
         <p:nvSpPr>
-          <p:cNvPr id="1983503959" name="Shape 1061"/>
+          <p:cNvPr id="200487203" name="Shape 1061"/>
           <p:cNvSpPr>
             <a:spLocks noChangeArrowheads="1" noGrp="1"/>
           </p:cNvSpPr>
@@ -4503,7 +4803,7 @@
         </p:nvSpPr>
         <p:spPr bwMode="auto">
           <a:xfrm>
-            <a:off x="1637457" y="1"/>
+            <a:off x="1637456" y="1"/>
             <a:ext cx="3839633" cy="2609650"/>
           </a:xfrm>
           <a:custGeom>
@@ -4613,7 +4913,7 @@
       </p:sp>
       <p:sp>
         <p:nvSpPr>
-          <p:cNvPr id="786583475" name="Title 1"/>
+          <p:cNvPr id="2057450558" name="Title 1"/>
           <p:cNvSpPr>
             <a:spLocks noGrp="1"/>
           </p:cNvSpPr>
@@ -4649,7 +4949,7 @@
       </p:sp>
       <p:sp>
         <p:nvSpPr>
-          <p:cNvPr id="1815272094" name="Text Placeholder 2"/>
+          <p:cNvPr id="1925478825" name="Text Placeholder 2"/>
           <p:cNvSpPr>
             <a:spLocks noGrp="1"/>
           </p:cNvSpPr>
@@ -4725,7 +5025,7 @@
       </p:sp>
       <p:sp>
         <p:nvSpPr>
-          <p:cNvPr id="1251112377" name="Date Placeholder 3"/>
+          <p:cNvPr id="2084087575" name="Date Placeholder 3"/>
           <p:cNvSpPr>
             <a:spLocks noGrp="1"/>
           </p:cNvSpPr>
@@ -4736,7 +5036,7 @@
         <p:spPr bwMode="auto">
           <a:xfrm>
             <a:off x="609599" y="6356351"/>
-            <a:ext cx="2844799" cy="365125"/>
+            <a:ext cx="2844798" cy="365125"/>
           </a:xfrm>
           <a:prstGeom prst="rect">
             <a:avLst/>
@@ -4769,7 +5069,7 @@
       </p:sp>
       <p:sp>
         <p:nvSpPr>
-          <p:cNvPr id="288485945" name="Footer Placeholder 4"/>
+          <p:cNvPr id="314876584" name="Footer Placeholder 4"/>
           <p:cNvSpPr>
             <a:spLocks noGrp="1"/>
           </p:cNvSpPr>
@@ -4809,7 +5109,7 @@
       </p:sp>
       <p:sp>
         <p:nvSpPr>
-          <p:cNvPr id="1431731401" name="Slide Number Placeholder 5"/>
+          <p:cNvPr id="1376970590" name="Slide Number Placeholder 5"/>
           <p:cNvSpPr>
             <a:spLocks noGrp="1"/>
           </p:cNvSpPr>
@@ -4820,7 +5120,7 @@
         <p:spPr bwMode="auto">
           <a:xfrm>
             <a:off x="8737599" y="6356351"/>
-            <a:ext cx="2844799" cy="365125"/>
+            <a:ext cx="2844798" cy="365125"/>
           </a:xfrm>
           <a:prstGeom prst="rect">
             <a:avLst/>
@@ -5157,7 +5457,7 @@
       </p:grpSpPr>
       <p:sp>
         <p:nvSpPr>
-          <p:cNvPr id="102744156" name="Title 1"/>
+          <p:cNvPr id="454069754" name="Title 1"/>
           <p:cNvSpPr>
             <a:spLocks noGrp="1"/>
           </p:cNvSpPr>
@@ -5167,7 +5467,7 @@
         </p:nvSpPr>
         <p:spPr bwMode="auto">
           <a:xfrm flipH="0" flipV="0">
-            <a:off x="1701521" y="1339644"/>
+            <a:off x="1745741" y="1917289"/>
             <a:ext cx="8788956" cy="2476857"/>
           </a:xfrm>
         </p:spPr>
@@ -5220,7 +5520,7 @@
       </p:sp>
       <p:sp>
         <p:nvSpPr>
-          <p:cNvPr id="823749719" name="Subtitle 2"/>
+          <p:cNvPr id="365166917" name="Subtitle 2"/>
           <p:cNvSpPr>
             <a:spLocks noGrp="1"/>
           </p:cNvSpPr>
@@ -5230,24 +5530,80 @@
         </p:nvSpPr>
         <p:spPr bwMode="auto">
           <a:xfrm>
-            <a:off x="3813952" y="5572564"/>
-            <a:ext cx="6720746" cy="720079"/>
+            <a:off x="4637403" y="5572563"/>
+            <a:ext cx="6720745" cy="720079"/>
           </a:xfrm>
         </p:spPr>
         <p:txBody>
-          <a:bodyPr/>
-          <a:lstStyle/>
-          <a:p>
-            <a:pPr>
-              <a:defRPr/>
-            </a:pPr>
+          <a:bodyPr vertOverflow="overflow" horzOverflow="overflow" vert="horz" wrap="square" lIns="91440" tIns="45720" rIns="91440" bIns="45720" numCol="1" spcCol="0" rtlCol="0" fromWordArt="0" anchor="t" anchorCtr="0" forceAA="0" upright="0" compatLnSpc="0">
+            <a:normAutofit fontScale="85000" lnSpcReduction="3000"/>
+          </a:bodyPr>
+          <a:lstStyle/>
+          <a:p>
+            <a:pPr>
+              <a:defRPr/>
+            </a:pPr>
+            <a:r>
+              <a:rPr lang="ro-RO" sz="2600">
+                <a:solidFill>
+                  <a:srgbClr val="808080"/>
+                </a:solidFill>
+                <a:latin typeface="Cantarell"/>
+                <a:ea typeface="Cantarell"/>
+                <a:cs typeface="Cantarell"/>
+              </a:rPr>
+              <a:t>Theodor </a:t>
+            </a:r>
             <a:r>
               <a:rPr lang="ro-RO" sz="2600">
                 <a:latin typeface="Cantarell"/>
                 <a:ea typeface="Cantarell"/>
                 <a:cs typeface="Cantarell"/>
               </a:rPr>
-              <a:t>Theodor Predescu, grupa 342A1</a:t>
+              <a:t>Predescu, grupa 342A1</a:t>
+            </a:r>
+            <a:endParaRPr lang="ro-RO" sz="2600">
+              <a:latin typeface="Cantarell"/>
+              <a:ea typeface="Cantarell"/>
+              <a:cs typeface="Cantarell"/>
+            </a:endParaRPr>
+          </a:p>
+          <a:p>
+            <a:pPr>
+              <a:defRPr/>
+            </a:pPr>
+            <a:r>
+              <a:rPr lang="en-US" sz="2600">
+                <a:solidFill>
+                  <a:srgbClr val="808080"/>
+                </a:solidFill>
+                <a:latin typeface="Cantarell"/>
+                <a:ea typeface="Cantarell"/>
+                <a:cs typeface="Cantarell"/>
+              </a:rPr>
+              <a:t>coordonator</a:t>
+            </a:r>
+            <a:r>
+              <a:rPr lang="en-US" sz="2600" b="0" i="0" u="none">
+                <a:solidFill>
+                  <a:srgbClr val="808080"/>
+                </a:solidFill>
+                <a:latin typeface="Cantarell"/>
+                <a:ea typeface="Cantarell"/>
+                <a:cs typeface="Cantarell"/>
+              </a:rPr>
+              <a:t> </a:t>
+            </a:r>
+            <a:r>
+              <a:rPr sz="2600" b="0" i="0" u="none">
+                <a:solidFill>
+                  <a:srgbClr val="808080"/>
+                </a:solidFill>
+                <a:latin typeface="Cantarell"/>
+                <a:ea typeface="Cantarell"/>
+                <a:cs typeface="Cantarell"/>
+              </a:rPr>
+              <a:t>Conf. dr. Ing. Florin Daniel Anton</a:t>
             </a:r>
             <a:endParaRPr lang="ro-RO" sz="2600">
               <a:latin typeface="Cantarell"/>
@@ -5291,7 +5647,7 @@
       </p:grpSpPr>
       <p:sp>
         <p:nvSpPr>
-          <p:cNvPr id="1699014950" name="Title 1"/>
+          <p:cNvPr id="1881325607" name="Title 1"/>
           <p:cNvSpPr>
             <a:spLocks noGrp="1"/>
           </p:cNvSpPr>
@@ -5299,7 +5655,12 @@
             <p:ph type="title"/>
           </p:nvPr>
         </p:nvSpPr>
-        <p:spPr bwMode="auto"/>
+        <p:spPr bwMode="auto">
+          <a:xfrm>
+            <a:off x="609598" y="784686"/>
+            <a:ext cx="10972800" cy="1143000"/>
+          </a:xfrm>
+        </p:spPr>
         <p:txBody>
           <a:bodyPr/>
           <a:lstStyle/>
@@ -5324,7 +5685,7 @@
       </p:sp>
       <p:sp>
         <p:nvSpPr>
-          <p:cNvPr id="1113103762" name="Content Placeholder 2"/>
+          <p:cNvPr id="908359208" name="Content Placeholder 2"/>
           <p:cNvSpPr>
             <a:spLocks noGrp="1"/>
           </p:cNvSpPr>
@@ -5334,8 +5695,8 @@
         </p:nvSpPr>
         <p:spPr bwMode="auto">
           <a:xfrm flipH="0" flipV="0">
-            <a:off x="609599" y="2925096"/>
-            <a:ext cx="10972800" cy="3201067"/>
+            <a:off x="609598" y="3435144"/>
+            <a:ext cx="5486400" cy="927919"/>
           </a:xfrm>
         </p:spPr>
         <p:txBody>
@@ -5362,6 +5723,28 @@
           </a:p>
         </p:txBody>
       </p:sp>
+      <p:pic>
+        <p:nvPicPr>
+          <p:cNvPr id="932518508" name=""/>
+          <p:cNvPicPr>
+            <a:picLocks noChangeAspect="1"/>
+          </p:cNvPicPr>
+          <p:nvPr/>
+        </p:nvPicPr>
+        <p:blipFill rotWithShape="1">
+          <a:blip r:embed="rId3"/>
+          <a:stretch/>
+        </p:blipFill>
+        <p:spPr bwMode="auto">
+          <a:xfrm flipH="0" flipV="0">
+            <a:off x="7306106" y="3576667"/>
+            <a:ext cx="4276292" cy="2445405"/>
+          </a:xfrm>
+          <a:prstGeom prst="rect">
+            <a:avLst/>
+          </a:prstGeom>
+        </p:spPr>
+      </p:pic>
     </p:spTree>
   </p:cSld>
   <p:clrMapOvr>
@@ -5397,7 +5780,7 @@
       </p:grpSpPr>
       <p:sp>
         <p:nvSpPr>
-          <p:cNvPr id="1534303889" name="Title 1"/>
+          <p:cNvPr id="1027134815" name="Title 1"/>
           <p:cNvSpPr>
             <a:spLocks noGrp="1"/>
           </p:cNvSpPr>
@@ -5405,7 +5788,12 @@
             <p:ph type="title"/>
           </p:nvPr>
         </p:nvSpPr>
-        <p:spPr bwMode="auto"/>
+        <p:spPr bwMode="auto">
+          <a:xfrm>
+            <a:off x="609598" y="835024"/>
+            <a:ext cx="10972800" cy="1143000"/>
+          </a:xfrm>
+        </p:spPr>
         <p:txBody>
           <a:bodyPr/>
           <a:lstStyle/>
@@ -5438,7 +5826,7 @@
       </p:sp>
       <p:sp>
         <p:nvSpPr>
-          <p:cNvPr id="1234334775" name="Content Placeholder 2"/>
+          <p:cNvPr id="973772922" name="Content Placeholder 2"/>
           <p:cNvSpPr>
             <a:spLocks noGrp="1"/>
           </p:cNvSpPr>
@@ -5448,8 +5836,8 @@
         </p:nvSpPr>
         <p:spPr bwMode="auto">
           <a:xfrm flipH="0" flipV="0">
-            <a:off x="609599" y="2605548"/>
-            <a:ext cx="10972800" cy="3520615"/>
+            <a:off x="609598" y="3447434"/>
+            <a:ext cx="5486400" cy="1149145"/>
           </a:xfrm>
         </p:spPr>
         <p:txBody>
@@ -5462,28 +5850,15 @@
               <a:defRPr/>
             </a:pPr>
             <a:r>
-              <a:rPr lang="ro-RO">
+              <a:rPr sz="3200" b="0" i="0" u="none">
+                <a:solidFill>
+                  <a:srgbClr val="000000"/>
+                </a:solidFill>
                 <a:latin typeface="Cantarell"/>
                 <a:ea typeface="Cantarell"/>
                 <a:cs typeface="Cantarell"/>
               </a:rPr>
-              <a:t>Prevenirea intruziunilor</a:t>
-            </a:r>
-            <a:r>
-              <a:rPr lang="en-US">
-                <a:latin typeface="Cantarell"/>
-                <a:ea typeface="Cantarell"/>
-                <a:cs typeface="Cantarell"/>
-              </a:rPr>
-              <a:t> </a:t>
-            </a:r>
-            <a:r>
-              <a:rPr lang="ro-RO">
-                <a:latin typeface="Cantarell"/>
-                <a:ea typeface="Cantarell"/>
-                <a:cs typeface="Cantarell"/>
-              </a:rPr>
-              <a:t>pe dispozitive specifice</a:t>
+              <a:t>Protecția dispozitivelor împotriva intruziunilor</a:t>
             </a:r>
             <a:endParaRPr>
               <a:latin typeface="Cantarell"/>
@@ -5492,6 +5867,50 @@
           </a:p>
         </p:txBody>
       </p:sp>
+      <p:pic>
+        <p:nvPicPr>
+          <p:cNvPr id="958801543" name=""/>
+          <p:cNvPicPr>
+            <a:picLocks noChangeAspect="1"/>
+          </p:cNvPicPr>
+          <p:nvPr/>
+        </p:nvPicPr>
+        <p:blipFill rotWithShape="1">
+          <a:blip r:embed="rId3"/>
+          <a:stretch/>
+        </p:blipFill>
+        <p:spPr bwMode="auto">
+          <a:xfrm flipH="0" flipV="0">
+            <a:off x="1963737" y="1501774"/>
+            <a:ext cx="1055724" cy="1055724"/>
+          </a:xfrm>
+          <a:prstGeom prst="rect">
+            <a:avLst/>
+          </a:prstGeom>
+        </p:spPr>
+      </p:pic>
+      <p:pic>
+        <p:nvPicPr>
+          <p:cNvPr id="125818981" name=""/>
+          <p:cNvPicPr>
+            <a:picLocks noChangeAspect="1"/>
+          </p:cNvPicPr>
+          <p:nvPr/>
+        </p:nvPicPr>
+        <p:blipFill rotWithShape="1">
+          <a:blip r:embed="rId4"/>
+          <a:stretch/>
+        </p:blipFill>
+        <p:spPr bwMode="auto">
+          <a:xfrm flipH="0" flipV="0">
+            <a:off x="8200710" y="3227994"/>
+            <a:ext cx="3105778" cy="3105778"/>
+          </a:xfrm>
+          <a:prstGeom prst="rect">
+            <a:avLst/>
+          </a:prstGeom>
+        </p:spPr>
+      </p:pic>
     </p:spTree>
   </p:cSld>
   <p:clrMapOvr>
@@ -5527,7 +5946,7 @@
       </p:grpSpPr>
       <p:sp>
         <p:nvSpPr>
-          <p:cNvPr id="265442113" name="Title 1"/>
+          <p:cNvPr id="891249792" name="Title 1"/>
           <p:cNvSpPr>
             <a:spLocks noGrp="1"/>
           </p:cNvSpPr>
@@ -5535,7 +5954,12 @@
             <p:ph type="title"/>
           </p:nvPr>
         </p:nvSpPr>
-        <p:spPr bwMode="auto"/>
+        <p:spPr bwMode="auto">
+          <a:xfrm>
+            <a:off x="609598" y="835024"/>
+            <a:ext cx="10972800" cy="1143000"/>
+          </a:xfrm>
+        </p:spPr>
         <p:txBody>
           <a:bodyPr/>
           <a:lstStyle/>
@@ -5560,7 +5984,7 @@
       </p:sp>
       <p:sp>
         <p:nvSpPr>
-          <p:cNvPr id="1456912005" name="Content Placeholder 2"/>
+          <p:cNvPr id="930637720" name="Content Placeholder 2"/>
           <p:cNvSpPr>
             <a:spLocks noGrp="1"/>
           </p:cNvSpPr>
@@ -5570,8 +5994,8 @@
         </p:nvSpPr>
         <p:spPr bwMode="auto">
           <a:xfrm flipH="0" flipV="0">
-            <a:off x="609599" y="2513370"/>
-            <a:ext cx="10972800" cy="3612792"/>
+            <a:off x="609598" y="3342915"/>
+            <a:ext cx="10972800" cy="1560871"/>
           </a:xfrm>
         </p:spPr>
         <p:txBody>
@@ -5669,6 +6093,34 @@
           </a:p>
         </p:txBody>
       </p:sp>
+      <p:pic>
+        <p:nvPicPr>
+          <p:cNvPr id="26576437" name=""/>
+          <p:cNvPicPr>
+            <a:picLocks noChangeAspect="1"/>
+          </p:cNvPicPr>
+          <p:nvPr/>
+        </p:nvPicPr>
+        <p:blipFill rotWithShape="1">
+          <a:blip r:embed="rId3">
+            <a:extLst>
+              <a:ext uri="{96DAC541-7B7A-43D3-8B79-37D633B846F1}">
+                <asvg:svgBlip xmlns:asvg="http://schemas.microsoft.com/office/drawing/2016/SVG/main" r:embed="rId4"/>
+              </a:ext>
+            </a:extLst>
+          </a:blip>
+          <a:stretch/>
+        </p:blipFill>
+        <p:spPr bwMode="auto">
+          <a:xfrm flipH="0" flipV="0">
+            <a:off x="1836237" y="1374274"/>
+            <a:ext cx="1397030" cy="1397030"/>
+          </a:xfrm>
+          <a:prstGeom prst="rect">
+            <a:avLst/>
+          </a:prstGeom>
+        </p:spPr>
+      </p:pic>
     </p:spTree>
   </p:cSld>
   <p:clrMapOvr>
@@ -5704,7 +6156,7 @@
       </p:grpSpPr>
       <p:sp>
         <p:nvSpPr>
-          <p:cNvPr id="220960207" name="Title 1"/>
+          <p:cNvPr id="570305120" name="Title 1"/>
           <p:cNvSpPr>
             <a:spLocks noGrp="1"/>
           </p:cNvSpPr>
@@ -5712,7 +6164,12 @@
             <p:ph type="title"/>
           </p:nvPr>
         </p:nvSpPr>
-        <p:spPr bwMode="auto"/>
+        <p:spPr bwMode="auto">
+          <a:xfrm>
+            <a:off x="609598" y="835024"/>
+            <a:ext cx="10972800" cy="1143000"/>
+          </a:xfrm>
+        </p:spPr>
         <p:txBody>
           <a:bodyPr/>
           <a:lstStyle/>
@@ -5737,7 +6194,7 @@
       </p:sp>
       <p:sp>
         <p:nvSpPr>
-          <p:cNvPr id="2110238289" name="Content Placeholder 2"/>
+          <p:cNvPr id="363601588" name="Content Placeholder 2"/>
           <p:cNvSpPr>
             <a:spLocks noGrp="1"/>
           </p:cNvSpPr>
@@ -5747,17 +6204,19 @@
         </p:nvSpPr>
         <p:spPr bwMode="auto">
           <a:xfrm flipH="0" flipV="0">
-            <a:off x="609599" y="2525661"/>
-            <a:ext cx="10972800" cy="3600502"/>
+            <a:off x="609598" y="3213919"/>
+            <a:ext cx="10972800" cy="2138516"/>
           </a:xfrm>
         </p:spPr>
         <p:txBody>
-          <a:bodyPr/>
-          <a:lstStyle/>
-          <a:p>
-            <a:pPr marL="0" indent="0">
+          <a:bodyPr vertOverflow="overflow" horzOverflow="overflow" vert="horz" wrap="square" lIns="91440" tIns="45720" rIns="91440" bIns="45720" numCol="1" spcCol="0" rtlCol="0" fromWordArt="0" anchor="t" anchorCtr="0" forceAA="0" upright="0" compatLnSpc="0">
+            <a:normAutofit/>
+          </a:bodyPr>
+          <a:lstStyle/>
+          <a:p>
+            <a:pPr marL="438080" indent="-438080">
               <a:buFont typeface="Arial"/>
-              <a:buNone/>
+              <a:buAutoNum type="arabicPeriod"/>
               <a:defRPr/>
             </a:pPr>
             <a:r>
@@ -5769,7 +6228,7 @@
                 <a:ea typeface="Cantarell"/>
                 <a:cs typeface="Cantarell"/>
               </a:rPr>
-              <a:t>1. componenta de filtrare la nivel kernel</a:t>
+              <a:t>de filtrare la nivel kernel</a:t>
             </a:r>
             <a:endParaRPr sz="3200">
               <a:solidFill>
@@ -5780,9 +6239,9 @@
             </a:endParaRPr>
           </a:p>
           <a:p>
-            <a:pPr marL="0" indent="0">
+            <a:pPr marL="438080" indent="-438080">
               <a:buFont typeface="Arial"/>
-              <a:buNone/>
+              <a:buAutoNum type="arabicPeriod"/>
               <a:defRPr/>
             </a:pPr>
             <a:r>
@@ -5794,7 +6253,7 @@
                 <a:ea typeface="Cantarell"/>
                 <a:cs typeface="Cantarell"/>
               </a:rPr>
-              <a:t>2. componenta de intermediere</a:t>
+              <a:t>de intermediere</a:t>
             </a:r>
             <a:endParaRPr sz="3200">
               <a:solidFill>
@@ -5805,9 +6264,9 @@
             </a:endParaRPr>
           </a:p>
           <a:p>
-            <a:pPr marL="0" indent="0">
+            <a:pPr marL="438080" indent="-438080">
               <a:buFont typeface="Arial"/>
-              <a:buNone/>
+              <a:buAutoNum type="arabicPeriod"/>
               <a:defRPr/>
             </a:pPr>
             <a:r>
@@ -5819,7 +6278,7 @@
                 <a:ea typeface="Cantarell"/>
                 <a:cs typeface="Cantarell"/>
               </a:rPr>
-              <a:t>3. componenta centrală</a:t>
+              <a:t>centrală</a:t>
             </a:r>
             <a:endParaRPr sz="3200">
               <a:solidFill>
@@ -5830,9 +6289,9 @@
             </a:endParaRPr>
           </a:p>
           <a:p>
-            <a:pPr marL="0" indent="0">
+            <a:pPr marL="438080" indent="-438080">
               <a:buFont typeface="Arial"/>
-              <a:buNone/>
+              <a:buAutoNum type="arabicPeriod"/>
               <a:defRPr/>
             </a:pPr>
             <a:r>
@@ -5844,7 +6303,7 @@
                 <a:ea typeface="Cantarell"/>
                 <a:cs typeface="Cantarell"/>
               </a:rPr>
-              <a:t>4. componenta de administrare</a:t>
+              <a:t>de administrare</a:t>
             </a:r>
             <a:endParaRPr sz="3200">
               <a:solidFill>
@@ -5854,20 +6313,92 @@
               <a:cs typeface="Cantarell"/>
             </a:endParaRPr>
           </a:p>
-          <a:p>
-            <a:pPr>
-              <a:defRPr/>
-            </a:pPr>
-            <a:endParaRPr>
-              <a:solidFill>
-                <a:srgbClr val="404040"/>
-              </a:solidFill>
-              <a:latin typeface="Cantarell"/>
-              <a:cs typeface="Cantarell"/>
-            </a:endParaRPr>
-          </a:p>
-        </p:txBody>
-      </p:sp>
+        </p:txBody>
+      </p:sp>
+      <p:pic>
+        <p:nvPicPr>
+          <p:cNvPr id="1607747448" name=""/>
+          <p:cNvPicPr>
+            <a:picLocks noChangeAspect="1"/>
+          </p:cNvPicPr>
+          <p:nvPr/>
+        </p:nvPicPr>
+        <p:blipFill rotWithShape="1">
+          <a:blip r:embed="rId3">
+            <a:extLst>
+              <a:ext uri="{96DAC541-7B7A-43D3-8B79-37D633B846F1}">
+                <asvg:svgBlip xmlns:asvg="http://schemas.microsoft.com/office/drawing/2016/SVG/main" r:embed="rId4"/>
+              </a:ext>
+            </a:extLst>
+          </a:blip>
+          <a:stretch/>
+        </p:blipFill>
+        <p:spPr bwMode="auto">
+          <a:xfrm flipH="0" flipV="0">
+            <a:off x="9046976" y="3392440"/>
+            <a:ext cx="922500" cy="922500"/>
+          </a:xfrm>
+          <a:prstGeom prst="rect">
+            <a:avLst/>
+          </a:prstGeom>
+        </p:spPr>
+      </p:pic>
+      <p:pic>
+        <p:nvPicPr>
+          <p:cNvPr id="1829034852" name=""/>
+          <p:cNvPicPr>
+            <a:picLocks noChangeAspect="1"/>
+          </p:cNvPicPr>
+          <p:nvPr/>
+        </p:nvPicPr>
+        <p:blipFill rotWithShape="1">
+          <a:blip r:embed="rId5">
+            <a:extLst>
+              <a:ext uri="{96DAC541-7B7A-43D3-8B79-37D633B846F1}">
+                <asvg:svgBlip xmlns:asvg="http://schemas.microsoft.com/office/drawing/2016/SVG/main" r:embed="rId6"/>
+              </a:ext>
+            </a:extLst>
+          </a:blip>
+          <a:stretch/>
+        </p:blipFill>
+        <p:spPr bwMode="auto">
+          <a:xfrm flipH="0" flipV="0">
+            <a:off x="8041976" y="4267451"/>
+            <a:ext cx="937499" cy="937499"/>
+          </a:xfrm>
+          <a:prstGeom prst="rect">
+            <a:avLst/>
+          </a:prstGeom>
+        </p:spPr>
+      </p:pic>
+      <p:pic>
+        <p:nvPicPr>
+          <p:cNvPr id="2053697879" name=""/>
+          <p:cNvPicPr>
+            <a:picLocks noChangeAspect="1"/>
+          </p:cNvPicPr>
+          <p:nvPr/>
+        </p:nvPicPr>
+        <p:blipFill rotWithShape="1">
+          <a:blip r:embed="rId7">
+            <a:extLst>
+              <a:ext uri="{96DAC541-7B7A-43D3-8B79-37D633B846F1}">
+                <asvg:svgBlip xmlns:asvg="http://schemas.microsoft.com/office/drawing/2016/SVG/main" r:embed="rId8"/>
+              </a:ext>
+            </a:extLst>
+          </a:blip>
+          <a:stretch/>
+        </p:blipFill>
+        <p:spPr bwMode="auto">
+          <a:xfrm flipH="0" flipV="0">
+            <a:off x="9811976" y="4893292"/>
+            <a:ext cx="932268" cy="932268"/>
+          </a:xfrm>
+          <a:prstGeom prst="rect">
+            <a:avLst/>
+          </a:prstGeom>
+        </p:spPr>
+      </p:pic>
     </p:spTree>
   </p:cSld>
   <p:clrMapOvr>
@@ -5903,7 +6434,7 @@
       </p:grpSpPr>
       <p:sp>
         <p:nvSpPr>
-          <p:cNvPr id="1886431915" name="Title 1"/>
+          <p:cNvPr id="1432793860" name="Title 1"/>
           <p:cNvSpPr>
             <a:spLocks noGrp="1"/>
           </p:cNvSpPr>
@@ -5911,7 +6442,12 @@
             <p:ph type="title"/>
           </p:nvPr>
         </p:nvSpPr>
-        <p:spPr bwMode="auto"/>
+        <p:spPr bwMode="auto">
+          <a:xfrm>
+            <a:off x="658760" y="846137"/>
+            <a:ext cx="10972800" cy="1143000"/>
+          </a:xfrm>
+        </p:spPr>
         <p:txBody>
           <a:bodyPr/>
           <a:lstStyle/>
@@ -5929,7 +6465,7 @@
       </p:sp>
       <p:sp>
         <p:nvSpPr>
-          <p:cNvPr id="1777454012" name="Content Placeholder 2"/>
+          <p:cNvPr id="490277999" name="Content Placeholder 2"/>
           <p:cNvSpPr>
             <a:spLocks noGrp="1"/>
           </p:cNvSpPr>
@@ -5939,29 +6475,31 @@
         </p:nvSpPr>
         <p:spPr bwMode="auto">
           <a:xfrm flipH="0" flipV="0">
-            <a:off x="609599" y="2832919"/>
-            <a:ext cx="10972800" cy="2826774"/>
+            <a:off x="609598" y="3385932"/>
+            <a:ext cx="10972800" cy="1517854"/>
           </a:xfrm>
         </p:spPr>
         <p:txBody>
-          <a:bodyPr/>
-          <a:lstStyle/>
-          <a:p>
-            <a:pPr>
-              <a:defRPr/>
-            </a:pPr>
-            <a:r>
-              <a:rPr/>
+          <a:bodyPr vertOverflow="overflow" horzOverflow="overflow" vert="horz" wrap="square" lIns="91440" tIns="45720" rIns="91440" bIns="45720" numCol="1" spcCol="0" rtlCol="0" fromWordArt="0" anchor="t" anchorCtr="0" forceAA="0" upright="0" compatLnSpc="0">
+            <a:normAutofit fontScale="40000" lnSpcReduction="12000"/>
+          </a:bodyPr>
+          <a:lstStyle/>
+          <a:p>
+            <a:pPr>
+              <a:defRPr/>
+            </a:pPr>
+            <a:r>
+              <a:rPr sz="8000"/>
               <a:t>Aplicarea regulilor alese pe echipament</a:t>
             </a:r>
-            <a:endParaRPr/>
-          </a:p>
-          <a:p>
-            <a:pPr>
-              <a:defRPr/>
-            </a:pPr>
-            <a:r>
-              <a:rPr>
+            <a:endParaRPr sz="8000"/>
+          </a:p>
+          <a:p>
+            <a:pPr>
+              <a:defRPr/>
+            </a:pPr>
+            <a:r>
+              <a:rPr sz="8000">
                 <a:solidFill>
                   <a:srgbClr val="404040"/>
                 </a:solidFill>
@@ -5969,29 +6507,79 @@
               <a:t>Extragerea </a:t>
             </a:r>
             <a:r>
-              <a:rPr/>
+              <a:rPr sz="8000"/>
               <a:t>și vizualizarea conexiunilor în mod grafic</a:t>
             </a:r>
-            <a:endParaRPr/>
-          </a:p>
-          <a:p>
-            <a:pPr>
-              <a:defRPr/>
-            </a:pPr>
-            <a:r>
-              <a:rPr/>
+            <a:endParaRPr sz="8000"/>
+          </a:p>
+          <a:p>
+            <a:pPr>
+              <a:defRPr/>
+            </a:pPr>
+            <a:r>
+              <a:rPr sz="8000"/>
               <a:t>Modificarea acestora în timp real</a:t>
             </a:r>
-            <a:endParaRPr/>
-          </a:p>
-          <a:p>
-            <a:pPr>
-              <a:defRPr/>
-            </a:pPr>
-            <a:endParaRPr/>
-          </a:p>
-        </p:txBody>
-      </p:sp>
+            <a:endParaRPr sz="8000"/>
+          </a:p>
+        </p:txBody>
+      </p:sp>
+      <p:pic>
+        <p:nvPicPr>
+          <p:cNvPr id="1923451626" name=""/>
+          <p:cNvPicPr>
+            <a:picLocks noChangeAspect="1"/>
+          </p:cNvPicPr>
+          <p:nvPr/>
+        </p:nvPicPr>
+        <p:blipFill rotWithShape="1">
+          <a:blip r:embed="rId3">
+            <a:extLst>
+              <a:ext uri="{96DAC541-7B7A-43D3-8B79-37D633B846F1}">
+                <asvg:svgBlip xmlns:asvg="http://schemas.microsoft.com/office/drawing/2016/SVG/main" r:embed="rId4"/>
+              </a:ext>
+            </a:extLst>
+          </a:blip>
+          <a:stretch/>
+        </p:blipFill>
+        <p:spPr bwMode="auto">
+          <a:xfrm flipH="0" flipV="0">
+            <a:off x="9105374" y="5339999"/>
+            <a:ext cx="787892" cy="787892"/>
+          </a:xfrm>
+          <a:prstGeom prst="rect">
+            <a:avLst/>
+          </a:prstGeom>
+        </p:spPr>
+      </p:pic>
+      <p:pic>
+        <p:nvPicPr>
+          <p:cNvPr id="1776895746" name=""/>
+          <p:cNvPicPr>
+            <a:picLocks noChangeAspect="1"/>
+          </p:cNvPicPr>
+          <p:nvPr/>
+        </p:nvPicPr>
+        <p:blipFill rotWithShape="1">
+          <a:blip r:embed="rId5">
+            <a:extLst>
+              <a:ext uri="{96DAC541-7B7A-43D3-8B79-37D633B846F1}">
+                <asvg:svgBlip xmlns:asvg="http://schemas.microsoft.com/office/drawing/2016/SVG/main" r:embed="rId6"/>
+              </a:ext>
+            </a:extLst>
+          </a:blip>
+          <a:stretch/>
+        </p:blipFill>
+        <p:spPr bwMode="auto">
+          <a:xfrm flipH="0" flipV="0">
+            <a:off x="1945847" y="1866899"/>
+            <a:ext cx="988279" cy="988279"/>
+          </a:xfrm>
+          <a:prstGeom prst="rect">
+            <a:avLst/>
+          </a:prstGeom>
+        </p:spPr>
+      </p:pic>
     </p:spTree>
   </p:cSld>
   <p:clrMapOvr>
@@ -6027,7 +6615,7 @@
       </p:grpSpPr>
       <p:sp>
         <p:nvSpPr>
-          <p:cNvPr id="1615936370" name="Title 1"/>
+          <p:cNvPr id="633431238" name="Title 1"/>
           <p:cNvSpPr>
             <a:spLocks noGrp="1"/>
           </p:cNvSpPr>
@@ -6037,7 +6625,7 @@
         </p:nvSpPr>
         <p:spPr bwMode="auto">
           <a:xfrm>
-            <a:off x="609599" y="1515961"/>
+            <a:off x="609599" y="1978024"/>
             <a:ext cx="10972800" cy="1143000"/>
           </a:xfrm>
         </p:spPr>
@@ -6091,7 +6679,7 @@
       </p:grpSpPr>
       <p:sp>
         <p:nvSpPr>
-          <p:cNvPr id="975787259" name="Title 1"/>
+          <p:cNvPr id="1731847172" name="Title 1"/>
           <p:cNvSpPr>
             <a:spLocks noGrp="1"/>
           </p:cNvSpPr>
@@ -6101,7 +6689,7 @@
         </p:nvSpPr>
         <p:spPr bwMode="auto">
           <a:xfrm>
-            <a:off x="609599" y="2026009"/>
+            <a:off x="609598" y="1978024"/>
             <a:ext cx="10972800" cy="1143000"/>
           </a:xfrm>
         </p:spPr>
